--- a/bundesliga_statsbomb_deck.pptx
+++ b/bundesliga_statsbomb_deck.pptx
@@ -17,12 +17,14 @@
     <p:sldId id="267" r:id="rId18"/>
     <p:sldId id="264" r:id="rId15"/>
     <p:sldId id="269" r:id="rId20"/>
+    <p:sldId id="276" r:id="rId27"/>
+    <p:sldId id="277" r:id="rId28"/>
     <p:sldId id="270" r:id="rId21"/>
     <p:sldId id="271" r:id="rId22"/>
     <p:sldId id="274" r:id="rId25"/>
     <p:sldId id="275" r:id="rId26"/>
-    <p:sldId id="265" r:id="rId16"/>
-    <p:sldId id="266" r:id="rId17"/>
+    <p:sldId id="278" r:id="rId29"/>
+    <p:sldId id="279" r:id="rId30"/>
   </p:sldIdLst>
   <p:sldSz cx="12191695" cy="6858000" type="screen4x3"/>
   <p:notesSz cx="6858000" cy="9144000"/>
@@ -5850,8 +5852,8 @@
         </p:nvSpPr>
         <p:spPr>
           <a:xfrm>
-            <a:off x="411480" y="182880"/>
-            <a:ext cx="10972800" cy="256032"/>
+            <a:off x="548640" y="411480"/>
+            <a:ext cx="10972800" cy="594360"/>
           </a:xfrm>
           <a:prstGeom prst="rect">
             <a:avLst/>
@@ -5865,13 +5867,13 @@
           <a:lstStyle/>
           <a:p>
             <a:r>
-              <a:rPr sz="1300" b="1">
+              <a:rPr sz="2800" b="1">
                 <a:solidFill>
                   <a:srgbClr val="3D5A80"/>
                 </a:solidFill>
-                <a:latin typeface="Calibri"/>
-              </a:rPr>
-              <a:t>RESULTS  ·  TRAITS → BL SUCCESS</a:t>
+                <a:latin typeface="Georgia"/>
+              </a:rPr>
+              <a:t>SUCCESS DEFINITION  ·  YEAR-1 MINUTES</a:t>
             </a:r>
           </a:p>
         </p:txBody>
@@ -5884,8 +5886,8 @@
         </p:nvSpPr>
         <p:spPr>
           <a:xfrm>
-            <a:off x="411480" y="438912"/>
-            <a:ext cx="10972800" cy="320040"/>
+            <a:off x="548640" y="960120"/>
+            <a:ext cx="10972800" cy="411480"/>
           </a:xfrm>
           <a:prstGeom prst="rect">
             <a:avLst/>
@@ -5899,13 +5901,13 @@
           <a:lstStyle/>
           <a:p>
             <a:r>
-              <a:rPr sz="2000" b="1">
-                <a:solidFill>
-                  <a:srgbClr val="1C1C1C"/>
+              <a:rPr sz="1500" b="0">
+                <a:solidFill>
+                  <a:srgbClr val="555555"/>
                 </a:solidFill>
                 <a:latin typeface="Georgia"/>
               </a:rPr>
-              <a:t>Prior trait percentiles most indicative of Year-1 minutes (Spearman ρ)</a:t>
+              <a:t>How we operationalize “Bundesliga success” in Phase 2 with open data.</a:t>
             </a:r>
           </a:p>
         </p:txBody>
@@ -5918,8 +5920,8 @@
         </p:nvSpPr>
         <p:spPr>
           <a:xfrm>
-            <a:off x="411480" y="804672"/>
-            <a:ext cx="5486400" cy="274320"/>
+            <a:off x="685800" y="1417320"/>
+            <a:ext cx="5394960" cy="4389120"/>
           </a:xfrm>
           <a:prstGeom prst="rect">
             <a:avLst/>
@@ -5932,1357 +5934,225 @@
           </a:bodyPr>
           <a:lstStyle/>
           <a:p>
-            <a:r>
-              <a:rPr sz="1400" b="1">
-                <a:solidFill>
-                  <a:srgbClr val="3D5A80"/>
-                </a:solidFill>
-                <a:latin typeface="Calibri"/>
-              </a:rPr>
-              <a:t>StatsBomb (N=60) — top |ρ|</a:t>
-            </a:r>
-          </a:p>
-        </p:txBody>
-      </p:sp>
-      <p:graphicFrame>
-        <p:nvGraphicFramePr>
-          <p:cNvPr id="6" name="Table 5"/>
-          <p:cNvGraphicFramePr>
-            <a:graphicFrameLocks noGrp="1"/>
-          </p:cNvGraphicFramePr>
-          <p:nvPr/>
-        </p:nvGraphicFramePr>
-        <p:xfrm>
-          <a:off x="411480" y="1097280"/>
-          <a:ext cx="4206240" cy="1792224"/>
-        </p:xfrm>
-        <a:graphic>
-          <a:graphicData uri="http://schemas.openxmlformats.org/drawingml/2006/table">
-            <a:tbl>
-              <a:tblPr firstRow="1" bandRow="1">
-                <a:tableStyleId>{5C22544A-7EE6-4342-B048-85BDC9FD1C3A}</a:tableStyleId>
-              </a:tblPr>
-              <a:tblGrid>
-                <a:gridCol w="2926080"/>
-                <a:gridCol w="640080"/>
-                <a:gridCol w="640080"/>
-              </a:tblGrid>
-              <a:tr h="256032">
-                <a:tc>
-                  <a:txBody>
-                    <a:bodyPr/>
-                    <a:lstStyle/>
-                    <a:p>
-                      <a:pPr>
-                        <a:defRPr sz="1000" b="1">
-                          <a:solidFill>
-                            <a:srgbClr val="FFFFFF"/>
-                          </a:solidFill>
-                          <a:latin typeface="Calibri"/>
-                        </a:defRPr>
-                      </a:pPr>
-                      <a:r>
-                        <a:t>Trait</a:t>
-                      </a:r>
-                    </a:p>
-                  </a:txBody>
-                  <a:tcPr>
-                    <a:solidFill>
-                      <a:srgbClr val="1C1C1C"/>
-                    </a:solidFill>
-                  </a:tcPr>
-                </a:tc>
-                <a:tc>
-                  <a:txBody>
-                    <a:bodyPr/>
-                    <a:lstStyle/>
-                    <a:p>
-                      <a:pPr>
-                        <a:defRPr sz="1000" b="1">
-                          <a:solidFill>
-                            <a:srgbClr val="FFFFFF"/>
-                          </a:solidFill>
-                          <a:latin typeface="Calibri"/>
-                        </a:defRPr>
-                      </a:pPr>
-                      <a:r>
-                        <a:t>ρ</a:t>
-                      </a:r>
-                    </a:p>
-                  </a:txBody>
-                  <a:tcPr>
-                    <a:solidFill>
-                      <a:srgbClr val="1C1C1C"/>
-                    </a:solidFill>
-                  </a:tcPr>
-                </a:tc>
-                <a:tc>
-                  <a:txBody>
-                    <a:bodyPr/>
-                    <a:lstStyle/>
-                    <a:p>
-                      <a:pPr>
-                        <a:defRPr sz="1000" b="1">
-                          <a:solidFill>
-                            <a:srgbClr val="FFFFFF"/>
-                          </a:solidFill>
-                          <a:latin typeface="Calibri"/>
-                        </a:defRPr>
-                      </a:pPr>
-                      <a:r>
-                        <a:t>p</a:t>
-                      </a:r>
-                    </a:p>
-                  </a:txBody>
-                  <a:tcPr>
-                    <a:solidFill>
-                      <a:srgbClr val="1C1C1C"/>
-                    </a:solidFill>
-                  </a:tcPr>
-                </a:tc>
-              </a:tr>
-              <a:tr h="256032">
-                <a:tc>
-                  <a:txBody>
-                    <a:bodyPr/>
-                    <a:lstStyle/>
-                    <a:p>
-                      <a:pPr>
-                        <a:defRPr sz="1000" b="0">
-                          <a:solidFill>
-                            <a:srgbClr val="1C1C1C"/>
-                          </a:solidFill>
-                          <a:latin typeface="Calibri"/>
-                        </a:defRPr>
-                      </a:pPr>
-                      <a:r>
-                        <a:t>DRB — Successful dribbles</a:t>
-                      </a:r>
-                    </a:p>
-                  </a:txBody>
-                  <a:tcPr>
-                    <a:solidFill>
-                      <a:srgbClr val="F0FAF4"/>
-                    </a:solidFill>
-                  </a:tcPr>
-                </a:tc>
-                <a:tc>
-                  <a:txBody>
-                    <a:bodyPr/>
-                    <a:lstStyle/>
-                    <a:p>
-                      <a:pPr>
-                        <a:defRPr sz="1000" b="0">
-                          <a:solidFill>
-                            <a:srgbClr val="1C1C1C"/>
-                          </a:solidFill>
-                          <a:latin typeface="Calibri"/>
-                        </a:defRPr>
-                      </a:pPr>
-                      <a:r>
-                        <a:t>-0.30</a:t>
-                      </a:r>
-                    </a:p>
-                  </a:txBody>
-                  <a:tcPr>
-                    <a:solidFill>
-                      <a:srgbClr val="F0FAF4"/>
-                    </a:solidFill>
-                  </a:tcPr>
-                </a:tc>
-                <a:tc>
-                  <a:txBody>
-                    <a:bodyPr/>
-                    <a:lstStyle/>
-                    <a:p>
-                      <a:pPr>
-                        <a:defRPr sz="1000" b="0">
-                          <a:solidFill>
-                            <a:srgbClr val="1C1C1C"/>
-                          </a:solidFill>
-                          <a:latin typeface="Calibri"/>
-                        </a:defRPr>
-                      </a:pPr>
-                      <a:r>
-                        <a:t>0.021</a:t>
-                      </a:r>
-                    </a:p>
-                  </a:txBody>
-                  <a:tcPr>
-                    <a:solidFill>
-                      <a:srgbClr val="F0FAF4"/>
-                    </a:solidFill>
-                  </a:tcPr>
-                </a:tc>
-              </a:tr>
-              <a:tr h="256032">
-                <a:tc>
-                  <a:txBody>
-                    <a:bodyPr/>
-                    <a:lstStyle/>
-                    <a:p>
-                      <a:pPr>
-                        <a:defRPr sz="1000" b="0">
-                          <a:solidFill>
-                            <a:srgbClr val="1C1C1C"/>
-                          </a:solidFill>
-                          <a:latin typeface="Calibri"/>
-                        </a:defRPr>
-                      </a:pPr>
-                      <a:r>
-                        <a:t>DIS — Dispossessed (inverted)</a:t>
-                      </a:r>
-                    </a:p>
-                  </a:txBody>
-                  <a:tcPr>
-                    <a:solidFill>
-                      <a:srgbClr val="FFFFFF"/>
-                    </a:solidFill>
-                  </a:tcPr>
-                </a:tc>
-                <a:tc>
-                  <a:txBody>
-                    <a:bodyPr/>
-                    <a:lstStyle/>
-                    <a:p>
-                      <a:pPr>
-                        <a:defRPr sz="1000" b="0">
-                          <a:solidFill>
-                            <a:srgbClr val="1C1C1C"/>
-                          </a:solidFill>
-                          <a:latin typeface="Calibri"/>
-                        </a:defRPr>
-                      </a:pPr>
-                      <a:r>
-                        <a:t>0.29</a:t>
-                      </a:r>
-                    </a:p>
-                  </a:txBody>
-                  <a:tcPr>
-                    <a:solidFill>
-                      <a:srgbClr val="FFFFFF"/>
-                    </a:solidFill>
-                  </a:tcPr>
-                </a:tc>
-                <a:tc>
-                  <a:txBody>
-                    <a:bodyPr/>
-                    <a:lstStyle/>
-                    <a:p>
-                      <a:pPr>
-                        <a:defRPr sz="1000" b="0">
-                          <a:solidFill>
-                            <a:srgbClr val="1C1C1C"/>
-                          </a:solidFill>
-                          <a:latin typeface="Calibri"/>
-                        </a:defRPr>
-                      </a:pPr>
-                      <a:r>
-                        <a:t>0.026</a:t>
-                      </a:r>
-                    </a:p>
-                  </a:txBody>
-                  <a:tcPr>
-                    <a:solidFill>
-                      <a:srgbClr val="FFFFFF"/>
-                    </a:solidFill>
-                  </a:tcPr>
-                </a:tc>
-              </a:tr>
-              <a:tr h="256032">
-                <a:tc>
-                  <a:txBody>
-                    <a:bodyPr/>
-                    <a:lstStyle/>
-                    <a:p>
-                      <a:pPr>
-                        <a:defRPr sz="1000" b="0">
-                          <a:solidFill>
-                            <a:srgbClr val="1C1C1C"/>
-                          </a:solidFill>
-                          <a:latin typeface="Calibri"/>
-                        </a:defRPr>
-                      </a:pPr>
-                      <a:r>
-                        <a:t>PRS — Pressures</a:t>
-                      </a:r>
-                    </a:p>
-                  </a:txBody>
-                  <a:tcPr>
-                    <a:solidFill>
-                      <a:srgbClr val="F0FAF4"/>
-                    </a:solidFill>
-                  </a:tcPr>
-                </a:tc>
-                <a:tc>
-                  <a:txBody>
-                    <a:bodyPr/>
-                    <a:lstStyle/>
-                    <a:p>
-                      <a:pPr>
-                        <a:defRPr sz="1000" b="0">
-                          <a:solidFill>
-                            <a:srgbClr val="1C1C1C"/>
-                          </a:solidFill>
-                          <a:latin typeface="Calibri"/>
-                        </a:defRPr>
-                      </a:pPr>
-                      <a:r>
-                        <a:t>-0.29</a:t>
-                      </a:r>
-                    </a:p>
-                  </a:txBody>
-                  <a:tcPr>
-                    <a:solidFill>
-                      <a:srgbClr val="F0FAF4"/>
-                    </a:solidFill>
-                  </a:tcPr>
-                </a:tc>
-                <a:tc>
-                  <a:txBody>
-                    <a:bodyPr/>
-                    <a:lstStyle/>
-                    <a:p>
-                      <a:pPr>
-                        <a:defRPr sz="1000" b="0">
-                          <a:solidFill>
-                            <a:srgbClr val="1C1C1C"/>
-                          </a:solidFill>
-                          <a:latin typeface="Calibri"/>
-                        </a:defRPr>
-                      </a:pPr>
-                      <a:r>
-                        <a:t>0.026</a:t>
-                      </a:r>
-                    </a:p>
-                  </a:txBody>
-                  <a:tcPr>
-                    <a:solidFill>
-                      <a:srgbClr val="F0FAF4"/>
-                    </a:solidFill>
-                  </a:tcPr>
-                </a:tc>
-              </a:tr>
-              <a:tr h="256032">
-                <a:tc>
-                  <a:txBody>
-                    <a:bodyPr/>
-                    <a:lstStyle/>
-                    <a:p>
-                      <a:pPr>
-                        <a:defRPr sz="1000" b="0">
-                          <a:solidFill>
-                            <a:srgbClr val="1C1C1C"/>
-                          </a:solidFill>
-                          <a:latin typeface="Calibri"/>
-                        </a:defRPr>
-                      </a:pPr>
-                      <a:r>
-                        <a:t>PPC — Progressive passes (~10m+ to</a:t>
-                      </a:r>
-                    </a:p>
-                  </a:txBody>
-                  <a:tcPr>
-                    <a:solidFill>
-                      <a:srgbClr val="FFFFFF"/>
-                    </a:solidFill>
-                  </a:tcPr>
-                </a:tc>
-                <a:tc>
-                  <a:txBody>
-                    <a:bodyPr/>
-                    <a:lstStyle/>
-                    <a:p>
-                      <a:pPr>
-                        <a:defRPr sz="1000" b="0">
-                          <a:solidFill>
-                            <a:srgbClr val="1C1C1C"/>
-                          </a:solidFill>
-                          <a:latin typeface="Calibri"/>
-                        </a:defRPr>
-                      </a:pPr>
-                      <a:r>
-                        <a:t>0.22</a:t>
-                      </a:r>
-                    </a:p>
-                  </a:txBody>
-                  <a:tcPr>
-                    <a:solidFill>
-                      <a:srgbClr val="FFFFFF"/>
-                    </a:solidFill>
-                  </a:tcPr>
-                </a:tc>
-                <a:tc>
-                  <a:txBody>
-                    <a:bodyPr/>
-                    <a:lstStyle/>
-                    <a:p>
-                      <a:pPr>
-                        <a:defRPr sz="1000" b="0">
-                          <a:solidFill>
-                            <a:srgbClr val="1C1C1C"/>
-                          </a:solidFill>
-                          <a:latin typeface="Calibri"/>
-                        </a:defRPr>
-                      </a:pPr>
-                      <a:r>
-                        <a:t>0.092</a:t>
-                      </a:r>
-                    </a:p>
-                  </a:txBody>
-                  <a:tcPr>
-                    <a:solidFill>
-                      <a:srgbClr val="FFFFFF"/>
-                    </a:solidFill>
-                  </a:tcPr>
-                </a:tc>
-              </a:tr>
-              <a:tr h="256032">
-                <a:tc>
-                  <a:txBody>
-                    <a:bodyPr/>
-                    <a:lstStyle/>
-                    <a:p>
-                      <a:pPr>
-                        <a:defRPr sz="1000" b="0">
-                          <a:solidFill>
-                            <a:srgbClr val="1C1C1C"/>
-                          </a:solidFill>
-                          <a:latin typeface="Calibri"/>
-                        </a:defRPr>
-                      </a:pPr>
-                      <a:r>
-                        <a:t>PATT — Passes into final third</a:t>
-                      </a:r>
-                    </a:p>
-                  </a:txBody>
-                  <a:tcPr>
-                    <a:solidFill>
-                      <a:srgbClr val="F0FAF4"/>
-                    </a:solidFill>
-                  </a:tcPr>
-                </a:tc>
-                <a:tc>
-                  <a:txBody>
-                    <a:bodyPr/>
-                    <a:lstStyle/>
-                    <a:p>
-                      <a:pPr>
-                        <a:defRPr sz="1000" b="0">
-                          <a:solidFill>
-                            <a:srgbClr val="1C1C1C"/>
-                          </a:solidFill>
-                          <a:latin typeface="Calibri"/>
-                        </a:defRPr>
-                      </a:pPr>
-                      <a:r>
-                        <a:t>-0.21</a:t>
-                      </a:r>
-                    </a:p>
-                  </a:txBody>
-                  <a:tcPr>
-                    <a:solidFill>
-                      <a:srgbClr val="F0FAF4"/>
-                    </a:solidFill>
-                  </a:tcPr>
-                </a:tc>
-                <a:tc>
-                  <a:txBody>
-                    <a:bodyPr/>
-                    <a:lstStyle/>
-                    <a:p>
-                      <a:pPr>
-                        <a:defRPr sz="1000" b="0">
-                          <a:solidFill>
-                            <a:srgbClr val="1C1C1C"/>
-                          </a:solidFill>
-                          <a:latin typeface="Calibri"/>
-                        </a:defRPr>
-                      </a:pPr>
-                      <a:r>
-                        <a:t>0.104</a:t>
-                      </a:r>
-                    </a:p>
-                  </a:txBody>
-                  <a:tcPr>
-                    <a:solidFill>
-                      <a:srgbClr val="F0FAF4"/>
-                    </a:solidFill>
-                  </a:tcPr>
-                </a:tc>
-              </a:tr>
-              <a:tr h="256032">
-                <a:tc>
-                  <a:txBody>
-                    <a:bodyPr/>
-                    <a:lstStyle/>
-                    <a:p>
-                      <a:pPr>
-                        <a:defRPr sz="1000" b="0">
-                          <a:solidFill>
-                            <a:srgbClr val="1C1C1C"/>
-                          </a:solidFill>
-                          <a:latin typeface="Calibri"/>
-                        </a:defRPr>
-                      </a:pPr>
-                      <a:r>
-                        <a:t>XG — Non-pen xG</a:t>
-                      </a:r>
-                    </a:p>
-                  </a:txBody>
-                  <a:tcPr>
-                    <a:solidFill>
-                      <a:srgbClr val="FFFFFF"/>
-                    </a:solidFill>
-                  </a:tcPr>
-                </a:tc>
-                <a:tc>
-                  <a:txBody>
-                    <a:bodyPr/>
-                    <a:lstStyle/>
-                    <a:p>
-                      <a:pPr>
-                        <a:defRPr sz="1000" b="0">
-                          <a:solidFill>
-                            <a:srgbClr val="1C1C1C"/>
-                          </a:solidFill>
-                          <a:latin typeface="Calibri"/>
-                        </a:defRPr>
-                      </a:pPr>
-                      <a:r>
-                        <a:t>-0.17</a:t>
-                      </a:r>
-                    </a:p>
-                  </a:txBody>
-                  <a:tcPr>
-                    <a:solidFill>
-                      <a:srgbClr val="FFFFFF"/>
-                    </a:solidFill>
-                  </a:tcPr>
-                </a:tc>
-                <a:tc>
-                  <a:txBody>
-                    <a:bodyPr/>
-                    <a:lstStyle/>
-                    <a:p>
-                      <a:pPr>
-                        <a:defRPr sz="1000" b="0">
-                          <a:solidFill>
-                            <a:srgbClr val="1C1C1C"/>
-                          </a:solidFill>
-                          <a:latin typeface="Calibri"/>
-                        </a:defRPr>
-                      </a:pPr>
-                      <a:r>
-                        <a:t>0.204</a:t>
-                      </a:r>
-                    </a:p>
-                  </a:txBody>
-                  <a:tcPr>
-                    <a:solidFill>
-                      <a:srgbClr val="FFFFFF"/>
-                    </a:solidFill>
-                  </a:tcPr>
-                </a:tc>
-              </a:tr>
-            </a:tbl>
-          </a:graphicData>
-        </a:graphic>
-      </p:graphicFrame>
-      <p:sp>
-        <p:nvSpPr>
-          <p:cNvPr id="7" name="TextBox 6"/>
-          <p:cNvSpPr txBox="1"/>
+            <a:pPr>
+              <a:spcAft>
+                <a:spcPts val="600"/>
+              </a:spcAft>
+            </a:pPr>
+            <a:r>
+              <a:rPr sz="1400">
+                <a:solidFill>
+                  <a:srgbClr val="1C1C1C"/>
+                </a:solidFill>
+                <a:latin typeface="Arial"/>
+              </a:rPr>
+              <a:t>Primary success marker: Bundesliga minutes played in the player’s first BL season (Y1 minutes)</a:t>
+            </a:r>
+          </a:p>
+          <a:p>
+            <a:pPr>
+              <a:spcAft>
+                <a:spcPts val="600"/>
+              </a:spcAft>
+            </a:pPr>
+            <a:r>
+              <a:rPr sz="1400">
+                <a:solidFill>
+                  <a:srgbClr val="1C1C1C"/>
+                </a:solidFill>
+                <a:latin typeface="Arial"/>
+              </a:rPr>
+              <a:t>Interpretation: playing-time success — did the club trust and use the inbound player?</a:t>
+            </a:r>
+          </a:p>
+          <a:p>
+            <a:pPr>
+              <a:spcAft>
+                <a:spcPts val="600"/>
+              </a:spcAft>
+            </a:pPr>
+            <a:r>
+              <a:rPr sz="1400">
+                <a:solidFill>
+                  <a:srgbClr val="1C1C1C"/>
+                </a:solidFill>
+                <a:latin typeface="Arial"/>
+              </a:rPr>
+              <a:t>Also reported: Y1 minutes percentile (rank in cohort) and stable-trait score (profile fit)</a:t>
+            </a:r>
+          </a:p>
+          <a:p>
+            <a:pPr>
+              <a:spcAft>
+                <a:spcPts val="600"/>
+              </a:spcAft>
+            </a:pPr>
+            <a:r>
+              <a:rPr sz="1400">
+                <a:solidFill>
+                  <a:srgbClr val="1C1C1C"/>
+                </a:solidFill>
+                <a:latin typeface="Arial"/>
+              </a:rPr>
+              <a:t>Trait &amp; league tests ask: which prior signals line up with more Y1 minutes?</a:t>
+            </a:r>
+          </a:p>
+          <a:p>
+            <a:pPr>
+              <a:spcAft>
+                <a:spcPts val="600"/>
+              </a:spcAft>
+            </a:pPr>
+            <a:r>
+              <a:rPr sz="1400">
+                <a:solidFill>
+                  <a:srgbClr val="1C1C1C"/>
+                </a:solidFill>
+                <a:latin typeface="Arial"/>
+              </a:rPr>
+              <a:t>Regression Δ Y1 min = estimated extra first-season minutes vs a reference league, holding controls</a:t>
+            </a:r>
+          </a:p>
+        </p:txBody>
+      </p:sp>
+      <p:sp>
+        <p:nvSpPr>
+          <p:cNvPr id="6" name="Rounded Rectangle 5"/>
+          <p:cNvSpPr/>
           <p:nvPr/>
         </p:nvSpPr>
         <p:spPr>
           <a:xfrm>
-            <a:off x="6126480" y="804672"/>
-            <a:ext cx="5486400" cy="274320"/>
+            <a:off x="6355080" y="1417320"/>
+            <a:ext cx="5212080" cy="4114800"/>
           </a:xfrm>
-          <a:prstGeom prst="rect">
+          <a:prstGeom prst="roundRect">
             <a:avLst/>
           </a:prstGeom>
-          <a:noFill/>
+          <a:solidFill>
+            <a:srgbClr val="EEF3F8"/>
+          </a:solidFill>
+          <a:ln>
+            <a:solidFill>
+              <a:srgbClr val="D0D4DB"/>
+            </a:solidFill>
+          </a:ln>
         </p:spPr>
-        <p:txBody>
-          <a:bodyPr wrap="square">
-            <a:spAutoFit/>
-          </a:bodyPr>
+        <p:style>
+          <a:lnRef idx="1">
+            <a:schemeClr val="accent1"/>
+          </a:lnRef>
+          <a:fillRef idx="3">
+            <a:schemeClr val="accent1"/>
+          </a:fillRef>
+          <a:effectRef idx="2">
+            <a:schemeClr val="accent1"/>
+          </a:effectRef>
+          <a:fontRef idx="minor">
+            <a:schemeClr val="lt1"/>
+          </a:fontRef>
+        </p:style>
+        <p:txBody>
+          <a:bodyPr rtlCol="0" anchor="ctr" wrap="square"/>
           <a:lstStyle/>
           <a:p>
-            <a:r>
-              <a:rPr sz="1400" b="1">
-                <a:solidFill>
-                  <a:srgbClr val="1B7A45"/>
-                </a:solidFill>
-                <a:latin typeface="Calibri"/>
-              </a:rPr>
-              <a:t>FBref Big 5 (N=117) — significant traits</a:t>
-            </a:r>
-          </a:p>
-        </p:txBody>
-      </p:sp>
-      <p:graphicFrame>
-        <p:nvGraphicFramePr>
-          <p:cNvPr id="8" name="Table 7"/>
-          <p:cNvGraphicFramePr>
-            <a:graphicFrameLocks noGrp="1"/>
-          </p:cNvGraphicFramePr>
-          <p:nvPr/>
-        </p:nvGraphicFramePr>
-        <p:xfrm>
-          <a:off x="6126480" y="1097280"/>
-          <a:ext cx="3931920" cy="2304288"/>
-        </p:xfrm>
-        <a:graphic>
-          <a:graphicData uri="http://schemas.openxmlformats.org/drawingml/2006/table">
-            <a:tbl>
-              <a:tblPr firstRow="1" bandRow="1">
-                <a:tableStyleId>{5C22544A-7EE6-4342-B048-85BDC9FD1C3A}</a:tableStyleId>
-              </a:tblPr>
-              <a:tblGrid>
-                <a:gridCol w="2743200"/>
-                <a:gridCol w="594360"/>
-                <a:gridCol w="594360"/>
-              </a:tblGrid>
-              <a:tr h="256032">
-                <a:tc>
-                  <a:txBody>
-                    <a:bodyPr/>
-                    <a:lstStyle/>
-                    <a:p>
-                      <a:pPr>
-                        <a:defRPr sz="1000" b="1">
-                          <a:solidFill>
-                            <a:srgbClr val="FFFFFF"/>
-                          </a:solidFill>
-                          <a:latin typeface="Calibri"/>
-                        </a:defRPr>
-                      </a:pPr>
-                      <a:r>
-                        <a:t>Trait</a:t>
-                      </a:r>
-                    </a:p>
-                  </a:txBody>
-                  <a:tcPr>
-                    <a:solidFill>
-                      <a:srgbClr val="1C1C1C"/>
-                    </a:solidFill>
-                  </a:tcPr>
-                </a:tc>
-                <a:tc>
-                  <a:txBody>
-                    <a:bodyPr/>
-                    <a:lstStyle/>
-                    <a:p>
-                      <a:pPr>
-                        <a:defRPr sz="1000" b="1">
-                          <a:solidFill>
-                            <a:srgbClr val="FFFFFF"/>
-                          </a:solidFill>
-                          <a:latin typeface="Calibri"/>
-                        </a:defRPr>
-                      </a:pPr>
-                      <a:r>
-                        <a:t>ρ</a:t>
-                      </a:r>
-                    </a:p>
-                  </a:txBody>
-                  <a:tcPr>
-                    <a:solidFill>
-                      <a:srgbClr val="1C1C1C"/>
-                    </a:solidFill>
-                  </a:tcPr>
-                </a:tc>
-                <a:tc>
-                  <a:txBody>
-                    <a:bodyPr/>
-                    <a:lstStyle/>
-                    <a:p>
-                      <a:pPr>
-                        <a:defRPr sz="1000" b="1">
-                          <a:solidFill>
-                            <a:srgbClr val="FFFFFF"/>
-                          </a:solidFill>
-                          <a:latin typeface="Calibri"/>
-                        </a:defRPr>
-                      </a:pPr>
-                      <a:r>
-                        <a:t>p</a:t>
-                      </a:r>
-                    </a:p>
-                  </a:txBody>
-                  <a:tcPr>
-                    <a:solidFill>
-                      <a:srgbClr val="1C1C1C"/>
-                    </a:solidFill>
-                  </a:tcPr>
-                </a:tc>
-              </a:tr>
-              <a:tr h="256032">
-                <a:tc>
-                  <a:txBody>
-                    <a:bodyPr/>
-                    <a:lstStyle/>
-                    <a:p>
-                      <a:pPr>
-                        <a:defRPr sz="1000" b="0">
-                          <a:solidFill>
-                            <a:srgbClr val="1C1C1C"/>
-                          </a:solidFill>
-                          <a:latin typeface="Calibri"/>
-                        </a:defRPr>
-                      </a:pPr>
-                      <a:r>
-                        <a:t>LOST — Lost Aerial*</a:t>
-                      </a:r>
-                    </a:p>
-                  </a:txBody>
-                  <a:tcPr>
-                    <a:solidFill>
-                      <a:srgbClr val="F0FAF4"/>
-                    </a:solidFill>
-                  </a:tcPr>
-                </a:tc>
-                <a:tc>
-                  <a:txBody>
-                    <a:bodyPr/>
-                    <a:lstStyle/>
-                    <a:p>
-                      <a:pPr>
-                        <a:defRPr sz="1000" b="0">
-                          <a:solidFill>
-                            <a:srgbClr val="1C1C1C"/>
-                          </a:solidFill>
-                          <a:latin typeface="Calibri"/>
-                        </a:defRPr>
-                      </a:pPr>
-                      <a:r>
-                        <a:t>0.25</a:t>
-                      </a:r>
-                    </a:p>
-                  </a:txBody>
-                  <a:tcPr>
-                    <a:solidFill>
-                      <a:srgbClr val="F0FAF4"/>
-                    </a:solidFill>
-                  </a:tcPr>
-                </a:tc>
-                <a:tc>
-                  <a:txBody>
-                    <a:bodyPr/>
-                    <a:lstStyle/>
-                    <a:p>
-                      <a:pPr>
-                        <a:defRPr sz="1000" b="0">
-                          <a:solidFill>
-                            <a:srgbClr val="1C1C1C"/>
-                          </a:solidFill>
-                          <a:latin typeface="Calibri"/>
-                        </a:defRPr>
-                      </a:pPr>
-                      <a:r>
-                        <a:t>0.007</a:t>
-                      </a:r>
-                    </a:p>
-                  </a:txBody>
-                  <a:tcPr>
-                    <a:solidFill>
-                      <a:srgbClr val="F0FAF4"/>
-                    </a:solidFill>
-                  </a:tcPr>
-                </a:tc>
-              </a:tr>
-              <a:tr h="256032">
-                <a:tc>
-                  <a:txBody>
-                    <a:bodyPr/>
-                    <a:lstStyle/>
-                    <a:p>
-                      <a:pPr>
-                        <a:defRPr sz="1000" b="0">
-                          <a:solidFill>
-                            <a:srgbClr val="1C1C1C"/>
-                          </a:solidFill>
-                          <a:latin typeface="Calibri"/>
-                        </a:defRPr>
-                      </a:pPr>
-                      <a:r>
-                        <a:t>FINAL — Final Third*</a:t>
-                      </a:r>
-                    </a:p>
-                  </a:txBody>
-                  <a:tcPr>
-                    <a:solidFill>
-                      <a:srgbClr val="FFFFFF"/>
-                    </a:solidFill>
-                  </a:tcPr>
-                </a:tc>
-                <a:tc>
-                  <a:txBody>
-                    <a:bodyPr/>
-                    <a:lstStyle/>
-                    <a:p>
-                      <a:pPr>
-                        <a:defRPr sz="1000" b="0">
-                          <a:solidFill>
-                            <a:srgbClr val="1C1C1C"/>
-                          </a:solidFill>
-                          <a:latin typeface="Calibri"/>
-                        </a:defRPr>
-                      </a:pPr>
-                      <a:r>
-                        <a:t>0.24</a:t>
-                      </a:r>
-                    </a:p>
-                  </a:txBody>
-                  <a:tcPr>
-                    <a:solidFill>
-                      <a:srgbClr val="FFFFFF"/>
-                    </a:solidFill>
-                  </a:tcPr>
-                </a:tc>
-                <a:tc>
-                  <a:txBody>
-                    <a:bodyPr/>
-                    <a:lstStyle/>
-                    <a:p>
-                      <a:pPr>
-                        <a:defRPr sz="1000" b="0">
-                          <a:solidFill>
-                            <a:srgbClr val="1C1C1C"/>
-                          </a:solidFill>
-                          <a:latin typeface="Calibri"/>
-                        </a:defRPr>
-                      </a:pPr>
-                      <a:r>
-                        <a:t>0.008</a:t>
-                      </a:r>
-                    </a:p>
-                  </a:txBody>
-                  <a:tcPr>
-                    <a:solidFill>
-                      <a:srgbClr val="FFFFFF"/>
-                    </a:solidFill>
-                  </a:tcPr>
-                </a:tc>
-              </a:tr>
-              <a:tr h="256032">
-                <a:tc>
-                  <a:txBody>
-                    <a:bodyPr/>
-                    <a:lstStyle/>
-                    <a:p>
-                      <a:pPr>
-                        <a:defRPr sz="1000" b="0">
-                          <a:solidFill>
-                            <a:srgbClr val="1C1C1C"/>
-                          </a:solidFill>
-                          <a:latin typeface="Calibri"/>
-                        </a:defRPr>
-                      </a:pPr>
-                      <a:r>
-                        <a:t>SH — Sh Blocks*</a:t>
-                      </a:r>
-                    </a:p>
-                  </a:txBody>
-                  <a:tcPr>
-                    <a:solidFill>
-                      <a:srgbClr val="F0FAF4"/>
-                    </a:solidFill>
-                  </a:tcPr>
-                </a:tc>
-                <a:tc>
-                  <a:txBody>
-                    <a:bodyPr/>
-                    <a:lstStyle/>
-                    <a:p>
-                      <a:pPr>
-                        <a:defRPr sz="1000" b="0">
-                          <a:solidFill>
-                            <a:srgbClr val="1C1C1C"/>
-                          </a:solidFill>
-                          <a:latin typeface="Calibri"/>
-                        </a:defRPr>
-                      </a:pPr>
-                      <a:r>
-                        <a:t>0.23</a:t>
-                      </a:r>
-                    </a:p>
-                  </a:txBody>
-                  <a:tcPr>
-                    <a:solidFill>
-                      <a:srgbClr val="F0FAF4"/>
-                    </a:solidFill>
-                  </a:tcPr>
-                </a:tc>
-                <a:tc>
-                  <a:txBody>
-                    <a:bodyPr/>
-                    <a:lstStyle/>
-                    <a:p>
-                      <a:pPr>
-                        <a:defRPr sz="1000" b="0">
-                          <a:solidFill>
-                            <a:srgbClr val="1C1C1C"/>
-                          </a:solidFill>
-                          <a:latin typeface="Calibri"/>
-                        </a:defRPr>
-                      </a:pPr>
-                      <a:r>
-                        <a:t>0.011</a:t>
-                      </a:r>
-                    </a:p>
-                  </a:txBody>
-                  <a:tcPr>
-                    <a:solidFill>
-                      <a:srgbClr val="F0FAF4"/>
-                    </a:solidFill>
-                  </a:tcPr>
-                </a:tc>
-              </a:tr>
-              <a:tr h="256032">
-                <a:tc>
-                  <a:txBody>
-                    <a:bodyPr/>
-                    <a:lstStyle/>
-                    <a:p>
-                      <a:pPr>
-                        <a:defRPr sz="1000" b="0">
-                          <a:solidFill>
-                            <a:srgbClr val="1C1C1C"/>
-                          </a:solidFill>
-                          <a:latin typeface="Calibri"/>
-                        </a:defRPr>
-                      </a:pPr>
-                      <a:r>
-                        <a:t>DEFPE — Def Pen Touches*</a:t>
-                      </a:r>
-                    </a:p>
-                  </a:txBody>
-                  <a:tcPr>
-                    <a:solidFill>
-                      <a:srgbClr val="FFFFFF"/>
-                    </a:solidFill>
-                  </a:tcPr>
-                </a:tc>
-                <a:tc>
-                  <a:txBody>
-                    <a:bodyPr/>
-                    <a:lstStyle/>
-                    <a:p>
-                      <a:pPr>
-                        <a:defRPr sz="1000" b="0">
-                          <a:solidFill>
-                            <a:srgbClr val="1C1C1C"/>
-                          </a:solidFill>
-                          <a:latin typeface="Calibri"/>
-                        </a:defRPr>
-                      </a:pPr>
-                      <a:r>
-                        <a:t>0.20</a:t>
-                      </a:r>
-                    </a:p>
-                  </a:txBody>
-                  <a:tcPr>
-                    <a:solidFill>
-                      <a:srgbClr val="FFFFFF"/>
-                    </a:solidFill>
-                  </a:tcPr>
-                </a:tc>
-                <a:tc>
-                  <a:txBody>
-                    <a:bodyPr/>
-                    <a:lstStyle/>
-                    <a:p>
-                      <a:pPr>
-                        <a:defRPr sz="1000" b="0">
-                          <a:solidFill>
-                            <a:srgbClr val="1C1C1C"/>
-                          </a:solidFill>
-                          <a:latin typeface="Calibri"/>
-                        </a:defRPr>
-                      </a:pPr>
-                      <a:r>
-                        <a:t>0.035</a:t>
-                      </a:r>
-                    </a:p>
-                  </a:txBody>
-                  <a:tcPr>
-                    <a:solidFill>
-                      <a:srgbClr val="FFFFFF"/>
-                    </a:solidFill>
-                  </a:tcPr>
-                </a:tc>
-              </a:tr>
-              <a:tr h="256032">
-                <a:tc>
-                  <a:txBody>
-                    <a:bodyPr/>
-                    <a:lstStyle/>
-                    <a:p>
-                      <a:pPr>
-                        <a:defRPr sz="1000" b="0">
-                          <a:solidFill>
-                            <a:srgbClr val="1C1C1C"/>
-                          </a:solidFill>
-                          <a:latin typeface="Calibri"/>
-                        </a:defRPr>
-                      </a:pPr>
-                      <a:r>
-                        <a:t>WONPE — Won percent Aerial</a:t>
-                      </a:r>
-                    </a:p>
-                  </a:txBody>
-                  <a:tcPr>
-                    <a:solidFill>
-                      <a:srgbClr val="F0FAF4"/>
-                    </a:solidFill>
-                  </a:tcPr>
-                </a:tc>
-                <a:tc>
-                  <a:txBody>
-                    <a:bodyPr/>
-                    <a:lstStyle/>
-                    <a:p>
-                      <a:pPr>
-                        <a:defRPr sz="1000" b="0">
-                          <a:solidFill>
-                            <a:srgbClr val="1C1C1C"/>
-                          </a:solidFill>
-                          <a:latin typeface="Calibri"/>
-                        </a:defRPr>
-                      </a:pPr>
-                      <a:r>
-                        <a:t>0.17</a:t>
-                      </a:r>
-                    </a:p>
-                  </a:txBody>
-                  <a:tcPr>
-                    <a:solidFill>
-                      <a:srgbClr val="F0FAF4"/>
-                    </a:solidFill>
-                  </a:tcPr>
-                </a:tc>
-                <a:tc>
-                  <a:txBody>
-                    <a:bodyPr/>
-                    <a:lstStyle/>
-                    <a:p>
-                      <a:pPr>
-                        <a:defRPr sz="1000" b="0">
-                          <a:solidFill>
-                            <a:srgbClr val="1C1C1C"/>
-                          </a:solidFill>
-                          <a:latin typeface="Calibri"/>
-                        </a:defRPr>
-                      </a:pPr>
-                      <a:r>
-                        <a:t>0.062</a:t>
-                      </a:r>
-                    </a:p>
-                  </a:txBody>
-                  <a:tcPr>
-                    <a:solidFill>
-                      <a:srgbClr val="F0FAF4"/>
-                    </a:solidFill>
-                  </a:tcPr>
-                </a:tc>
-              </a:tr>
-              <a:tr h="256032">
-                <a:tc>
-                  <a:txBody>
-                    <a:bodyPr/>
-                    <a:lstStyle/>
-                    <a:p>
-                      <a:pPr>
-                        <a:defRPr sz="1000" b="0">
-                          <a:solidFill>
-                            <a:srgbClr val="1C1C1C"/>
-                          </a:solidFill>
-                          <a:latin typeface="Calibri"/>
-                        </a:defRPr>
-                      </a:pPr>
-                      <a:r>
-                        <a:t>PRGDI — PrgDist Total</a:t>
-                      </a:r>
-                    </a:p>
-                  </a:txBody>
-                  <a:tcPr>
-                    <a:solidFill>
-                      <a:srgbClr val="FFFFFF"/>
-                    </a:solidFill>
-                  </a:tcPr>
-                </a:tc>
-                <a:tc>
-                  <a:txBody>
-                    <a:bodyPr/>
-                    <a:lstStyle/>
-                    <a:p>
-                      <a:pPr>
-                        <a:defRPr sz="1000" b="0">
-                          <a:solidFill>
-                            <a:srgbClr val="1C1C1C"/>
-                          </a:solidFill>
-                          <a:latin typeface="Calibri"/>
-                        </a:defRPr>
-                      </a:pPr>
-                      <a:r>
-                        <a:t>0.17</a:t>
-                      </a:r>
-                    </a:p>
-                  </a:txBody>
-                  <a:tcPr>
-                    <a:solidFill>
-                      <a:srgbClr val="FFFFFF"/>
-                    </a:solidFill>
-                  </a:tcPr>
-                </a:tc>
-                <a:tc>
-                  <a:txBody>
-                    <a:bodyPr/>
-                    <a:lstStyle/>
-                    <a:p>
-                      <a:pPr>
-                        <a:defRPr sz="1000" b="0">
-                          <a:solidFill>
-                            <a:srgbClr val="1C1C1C"/>
-                          </a:solidFill>
-                          <a:latin typeface="Calibri"/>
-                        </a:defRPr>
-                      </a:pPr>
-                      <a:r>
-                        <a:t>0.073</a:t>
-                      </a:r>
-                    </a:p>
-                  </a:txBody>
-                  <a:tcPr>
-                    <a:solidFill>
-                      <a:srgbClr val="FFFFFF"/>
-                    </a:solidFill>
-                  </a:tcPr>
-                </a:tc>
-              </a:tr>
-              <a:tr h="256032">
-                <a:tc>
-                  <a:txBody>
-                    <a:bodyPr/>
-                    <a:lstStyle/>
-                    <a:p>
-                      <a:pPr>
-                        <a:defRPr sz="1000" b="0">
-                          <a:solidFill>
-                            <a:srgbClr val="1C1C1C"/>
-                          </a:solidFill>
-                          <a:latin typeface="Calibri"/>
-                        </a:defRPr>
-                      </a:pPr>
-                      <a:r>
-                        <a:t>MIS — Mis Carries</a:t>
-                      </a:r>
-                    </a:p>
-                  </a:txBody>
-                  <a:tcPr>
-                    <a:solidFill>
-                      <a:srgbClr val="F0FAF4"/>
-                    </a:solidFill>
-                  </a:tcPr>
-                </a:tc>
-                <a:tc>
-                  <a:txBody>
-                    <a:bodyPr/>
-                    <a:lstStyle/>
-                    <a:p>
-                      <a:pPr>
-                        <a:defRPr sz="1000" b="0">
-                          <a:solidFill>
-                            <a:srgbClr val="1C1C1C"/>
-                          </a:solidFill>
-                          <a:latin typeface="Calibri"/>
-                        </a:defRPr>
-                      </a:pPr>
-                      <a:r>
-                        <a:t>0.16</a:t>
-                      </a:r>
-                    </a:p>
-                  </a:txBody>
-                  <a:tcPr>
-                    <a:solidFill>
-                      <a:srgbClr val="F0FAF4"/>
-                    </a:solidFill>
-                  </a:tcPr>
-                </a:tc>
-                <a:tc>
-                  <a:txBody>
-                    <a:bodyPr/>
-                    <a:lstStyle/>
-                    <a:p>
-                      <a:pPr>
-                        <a:defRPr sz="1000" b="0">
-                          <a:solidFill>
-                            <a:srgbClr val="1C1C1C"/>
-                          </a:solidFill>
-                          <a:latin typeface="Calibri"/>
-                        </a:defRPr>
-                      </a:pPr>
-                      <a:r>
-                        <a:t>0.078</a:t>
-                      </a:r>
-                    </a:p>
-                  </a:txBody>
-                  <a:tcPr>
-                    <a:solidFill>
-                      <a:srgbClr val="F0FAF4"/>
-                    </a:solidFill>
-                  </a:tcPr>
-                </a:tc>
-              </a:tr>
-              <a:tr h="256032">
-                <a:tc>
-                  <a:txBody>
-                    <a:bodyPr/>
-                    <a:lstStyle/>
-                    <a:p>
-                      <a:pPr>
-                        <a:defRPr sz="1000" b="0">
-                          <a:solidFill>
-                            <a:srgbClr val="1C1C1C"/>
-                          </a:solidFill>
-                          <a:latin typeface="Calibri"/>
-                        </a:defRPr>
-                      </a:pPr>
-                      <a:r>
-                        <a:t>CLR — Clr</a:t>
-                      </a:r>
-                    </a:p>
-                  </a:txBody>
-                  <a:tcPr>
-                    <a:solidFill>
-                      <a:srgbClr val="FFFFFF"/>
-                    </a:solidFill>
-                  </a:tcPr>
-                </a:tc>
-                <a:tc>
-                  <a:txBody>
-                    <a:bodyPr/>
-                    <a:lstStyle/>
-                    <a:p>
-                      <a:pPr>
-                        <a:defRPr sz="1000" b="0">
-                          <a:solidFill>
-                            <a:srgbClr val="1C1C1C"/>
-                          </a:solidFill>
-                          <a:latin typeface="Calibri"/>
-                        </a:defRPr>
-                      </a:pPr>
-                      <a:r>
-                        <a:t>0.13</a:t>
-                      </a:r>
-                    </a:p>
-                  </a:txBody>
-                  <a:tcPr>
-                    <a:solidFill>
-                      <a:srgbClr val="FFFFFF"/>
-                    </a:solidFill>
-                  </a:tcPr>
-                </a:tc>
-                <a:tc>
-                  <a:txBody>
-                    <a:bodyPr/>
-                    <a:lstStyle/>
-                    <a:p>
-                      <a:pPr>
-                        <a:defRPr sz="1000" b="0">
-                          <a:solidFill>
-                            <a:srgbClr val="1C1C1C"/>
-                          </a:solidFill>
-                          <a:latin typeface="Calibri"/>
-                        </a:defRPr>
-                      </a:pPr>
-                      <a:r>
-                        <a:t>0.162</a:t>
-                      </a:r>
-                    </a:p>
-                  </a:txBody>
-                  <a:tcPr>
-                    <a:solidFill>
-                      <a:srgbClr val="FFFFFF"/>
-                    </a:solidFill>
-                  </a:tcPr>
-                </a:tc>
-              </a:tr>
-            </a:tbl>
-          </a:graphicData>
-        </a:graphic>
-      </p:graphicFrame>
-      <p:sp>
-        <p:nvSpPr>
-          <p:cNvPr id="9" name="TextBox 8"/>
-          <p:cNvSpPr txBox="1"/>
-          <p:nvPr/>
-        </p:nvSpPr>
-        <p:spPr>
-          <a:xfrm>
-            <a:off x="411480" y="3657600"/>
-            <a:ext cx="11155680" cy="2560320"/>
-          </a:xfrm>
-          <a:prstGeom prst="rect">
-            <a:avLst/>
-          </a:prstGeom>
-          <a:noFill/>
-        </p:spPr>
-        <p:txBody>
-          <a:bodyPr wrap="square">
-            <a:spAutoFit/>
-          </a:bodyPr>
-          <a:lstStyle/>
-          <a:p>
-            <a:pPr>
-              <a:spcAft>
-                <a:spcPts val="400"/>
-              </a:spcAft>
-            </a:pPr>
+            <a:pPr algn="ctr"/>
+            <a:r>
+              <a:rPr b="1" sz="1600">
+                <a:solidFill>
+                  <a:srgbClr val="3D5A80"/>
+                </a:solidFill>
+                <a:latin typeface="Georgia"/>
+              </a:rPr>
+              <a:t>Why minutes?</a:t>
+            </a:r>
+          </a:p>
+          <a:p>
             <a:r>
               <a:rPr sz="1300">
                 <a:solidFill>
                   <a:srgbClr val="1C1C1C"/>
                 </a:solidFill>
-                <a:latin typeface="Calibri"/>
-              </a:rPr>
-              <a:t>StatsBomb (directional): higher prior progressive passes (PPC) &amp; dispossessed (inv) ↔ more Y1 minutes; high prior pressures/dribbles ↔ fewer minutes in this sample.</a:t>
-            </a:r>
-          </a:p>
-          <a:p>
-            <a:pPr>
-              <a:spcAft>
-                <a:spcPts val="400"/>
-              </a:spcAft>
-            </a:pPr>
+                <a:latin typeface="Arial"/>
+              </a:rPr>
+              <a:t/>
+            </a:r>
+          </a:p>
+          <a:p>
             <a:r>
               <a:rPr sz="1300">
                 <a:solidFill>
                   <a:srgbClr val="1C1C1C"/>
                 </a:solidFill>
-                <a:latin typeface="Calibri"/>
-              </a:rPr>
-              <a:t>FBref (stronger N): prior final-third passing, defensive box actions, blocks, aerials ↔ more Y1 minutes (ρ≈0.17–0.25, p&lt;0.05 for top traits).</a:t>
-            </a:r>
-          </a:p>
-          <a:p>
-            <a:pPr>
-              <a:spcAft>
-                <a:spcPts val="400"/>
-              </a:spcAft>
-            </a:pPr>
+                <a:latin typeface="Arial"/>
+              </a:rPr>
+              <a:t>Observable in FBref / StatsBomb cohorts</a:t>
+            </a:r>
+          </a:p>
+          <a:p>
             <a:r>
               <a:rPr sz="1300">
                 <a:solidFill>
                   <a:srgbClr val="1C1C1C"/>
                 </a:solidFill>
-                <a:latin typeface="Calibri"/>
-              </a:rPr>
-              <a:t>Takeaway for scouts: weight defensive involvement + progression in the penalty/third when judging Big-5 → BL transfers.</a:t>
+                <a:latin typeface="Arial"/>
+              </a:rPr>
+              <a:t/>
+            </a:r>
+          </a:p>
+          <a:p>
+            <a:r>
+              <a:rPr sz="1300">
+                <a:solidFill>
+                  <a:srgbClr val="1C1C1C"/>
+                </a:solidFill>
+                <a:latin typeface="Arial"/>
+              </a:rPr>
+              <a:t>Directly measures opportunity &amp; role</a:t>
+            </a:r>
+          </a:p>
+          <a:p>
+            <a:r>
+              <a:rPr sz="1300">
+                <a:solidFill>
+                  <a:srgbClr val="1C1C1C"/>
+                </a:solidFill>
+                <a:latin typeface="Arial"/>
+              </a:rPr>
+              <a:t/>
+            </a:r>
+          </a:p>
+          <a:p>
+            <a:r>
+              <a:rPr sz="1300">
+                <a:solidFill>
+                  <a:srgbClr val="1C1C1C"/>
+                </a:solidFill>
+                <a:latin typeface="Arial"/>
+              </a:rPr>
+              <a:t>Not the same as goals, xG, or team points</a:t>
+            </a:r>
+          </a:p>
+          <a:p>
+            <a:r>
+              <a:rPr sz="1300">
+                <a:solidFill>
+                  <a:srgbClr val="1C1C1C"/>
+                </a:solidFill>
+                <a:latin typeface="Arial"/>
+              </a:rPr>
+              <a:t/>
+            </a:r>
+          </a:p>
+          <a:p>
+            <a:r>
+              <a:rPr sz="1300">
+                <a:solidFill>
+                  <a:srgbClr val="1C1C1C"/>
+                </a:solidFill>
+                <a:latin typeface="Arial"/>
+              </a:rPr>
+              <a:t>Honest scope: associative scouting weights, not a forecast model</a:t>
             </a:r>
           </a:p>
         </p:txBody>
@@ -7356,6 +6226,1864 @@
         </p:nvSpPr>
         <p:spPr>
           <a:xfrm>
+            <a:off x="548640" y="411480"/>
+            <a:ext cx="10972800" cy="594360"/>
+          </a:xfrm>
+          <a:prstGeom prst="rect">
+            <a:avLst/>
+          </a:prstGeom>
+          <a:noFill/>
+        </p:spPr>
+        <p:txBody>
+          <a:bodyPr wrap="square">
+            <a:spAutoFit/>
+          </a:bodyPr>
+          <a:lstStyle/>
+          <a:p>
+            <a:r>
+              <a:rPr sz="2800" b="1">
+                <a:solidFill>
+                  <a:srgbClr val="3D5A80"/>
+                </a:solidFill>
+                <a:latin typeface="Georgia"/>
+              </a:rPr>
+              <a:t>IF WE HAD THE DATA  ·  TRANSFERMARKT VALUE</a:t>
+            </a:r>
+          </a:p>
+        </p:txBody>
+      </p:sp>
+      <p:sp>
+        <p:nvSpPr>
+          <p:cNvPr id="4" name="TextBox 3"/>
+          <p:cNvSpPr txBox="1"/>
+          <p:nvPr/>
+        </p:nvSpPr>
+        <p:spPr>
+          <a:xfrm>
+            <a:off x="548640" y="960120"/>
+            <a:ext cx="10972800" cy="411480"/>
+          </a:xfrm>
+          <a:prstGeom prst="rect">
+            <a:avLst/>
+          </a:prstGeom>
+          <a:noFill/>
+        </p:spPr>
+        <p:txBody>
+          <a:bodyPr wrap="square">
+            <a:spAutoFit/>
+          </a:bodyPr>
+          <a:lstStyle/>
+          <a:p>
+            <a:r>
+              <a:rPr sz="1500" b="0">
+                <a:solidFill>
+                  <a:srgbClr val="555555"/>
+                </a:solidFill>
+                <a:latin typeface="Georgia"/>
+              </a:rPr>
+              <a:t>What we would use instead of (or alongside) Y1 minutes.</a:t>
+            </a:r>
+          </a:p>
+        </p:txBody>
+      </p:sp>
+      <p:sp>
+        <p:nvSpPr>
+          <p:cNvPr id="5" name="TextBox 4"/>
+          <p:cNvSpPr txBox="1"/>
+          <p:nvPr/>
+        </p:nvSpPr>
+        <p:spPr>
+          <a:xfrm>
+            <a:off x="685800" y="1417320"/>
+            <a:ext cx="5394960" cy="3840480"/>
+          </a:xfrm>
+          <a:prstGeom prst="rect">
+            <a:avLst/>
+          </a:prstGeom>
+          <a:noFill/>
+        </p:spPr>
+        <p:txBody>
+          <a:bodyPr wrap="square">
+            <a:spAutoFit/>
+          </a:bodyPr>
+          <a:lstStyle/>
+          <a:p>
+            <a:pPr>
+              <a:spcAft>
+                <a:spcPts val="600"/>
+              </a:spcAft>
+            </a:pPr>
+            <a:r>
+              <a:rPr sz="1400">
+                <a:solidFill>
+                  <a:srgbClr val="1C1C1C"/>
+                </a:solidFill>
+                <a:latin typeface="Arial"/>
+              </a:rPr>
+              <a:t>Top indicator in a full club model: change in market value (Δ Transfermarkt MV)</a:t>
+            </a:r>
+          </a:p>
+          <a:p>
+            <a:pPr>
+              <a:spcAft>
+                <a:spcPts val="600"/>
+              </a:spcAft>
+            </a:pPr>
+            <a:r>
+              <a:rPr sz="1400">
+                <a:solidFill>
+                  <a:srgbClr val="1C1C1C"/>
+                </a:solidFill>
+                <a:latin typeface="Arial"/>
+              </a:rPr>
+              <a:t>Captures performance + hype + contract context in one outcome scouts care about</a:t>
+            </a:r>
+          </a:p>
+          <a:p>
+            <a:pPr>
+              <a:spcAft>
+                <a:spcPts val="600"/>
+              </a:spcAft>
+            </a:pPr>
+            <a:r>
+              <a:rPr sz="1400">
+                <a:solidFill>
+                  <a:srgbClr val="1C1C1C"/>
+                </a:solidFill>
+                <a:latin typeface="Arial"/>
+              </a:rPr>
+              <a:t>NYRB Axis-3 used MV; this project uses open data only — Transfermarkt bans bots</a:t>
+            </a:r>
+          </a:p>
+          <a:p>
+            <a:pPr>
+              <a:spcAft>
+                <a:spcPts val="600"/>
+              </a:spcAft>
+            </a:pPr>
+            <a:r>
+              <a:rPr sz="1400">
+                <a:solidFill>
+                  <a:srgbClr val="1C1C1C"/>
+                </a:solidFill>
+                <a:latin typeface="Arial"/>
+              </a:rPr>
+              <a:t>So we proxy success with Y1 minutes until a licensed MV feed is available</a:t>
+            </a:r>
+          </a:p>
+          <a:p>
+            <a:pPr>
+              <a:spcAft>
+                <a:spcPts val="600"/>
+              </a:spcAft>
+            </a:pPr>
+            <a:r>
+              <a:rPr sz="1400">
+                <a:solidFill>
+                  <a:srgbClr val="1C1C1C"/>
+                </a:solidFill>
+                <a:latin typeface="Arial"/>
+              </a:rPr>
+              <a:t>Natural extension: prior traits → Δ MV with holdout regression / ML</a:t>
+            </a:r>
+          </a:p>
+        </p:txBody>
+      </p:sp>
+      <p:sp>
+        <p:nvSpPr>
+          <p:cNvPr id="6" name="Rounded Rectangle 5"/>
+          <p:cNvSpPr/>
+          <p:nvPr/>
+        </p:nvSpPr>
+        <p:spPr>
+          <a:xfrm>
+            <a:off x="6355080" y="1417320"/>
+            <a:ext cx="5212080" cy="3840480"/>
+          </a:xfrm>
+          <a:prstGeom prst="roundRect">
+            <a:avLst/>
+          </a:prstGeom>
+          <a:solidFill>
+            <a:srgbClr val="EEF3F8"/>
+          </a:solidFill>
+          <a:ln>
+            <a:solidFill>
+              <a:srgbClr val="D0D4DB"/>
+            </a:solidFill>
+          </a:ln>
+        </p:spPr>
+        <p:style>
+          <a:lnRef idx="1">
+            <a:schemeClr val="accent1"/>
+          </a:lnRef>
+          <a:fillRef idx="3">
+            <a:schemeClr val="accent1"/>
+          </a:fillRef>
+          <a:effectRef idx="2">
+            <a:schemeClr val="accent1"/>
+          </a:effectRef>
+          <a:fontRef idx="minor">
+            <a:schemeClr val="lt1"/>
+          </a:fontRef>
+        </p:style>
+        <p:txBody>
+          <a:bodyPr rtlCol="0" anchor="ctr" wrap="square"/>
+          <a:lstStyle/>
+          <a:p>
+            <a:pPr algn="ctr"/>
+            <a:r>
+              <a:rPr b="1" sz="1600">
+                <a:solidFill>
+                  <a:srgbClr val="1B7A45"/>
+                </a:solidFill>
+                <a:latin typeface="Georgia"/>
+              </a:rPr>
+              <a:t>Bottom line</a:t>
+            </a:r>
+          </a:p>
+          <a:p>
+            <a:r>
+              <a:rPr sz="1300">
+                <a:solidFill>
+                  <a:srgbClr val="1C1C1C"/>
+                </a:solidFill>
+                <a:latin typeface="Arial"/>
+              </a:rPr>
+              <a:t/>
+            </a:r>
+          </a:p>
+          <a:p>
+            <a:r>
+              <a:rPr sz="1300">
+                <a:solidFill>
+                  <a:srgbClr val="1C1C1C"/>
+                </a:solidFill>
+                <a:latin typeface="Arial"/>
+              </a:rPr>
+              <a:t>Y1 minutes = best open-data proxy for first-year BL success</a:t>
+            </a:r>
+          </a:p>
+          <a:p>
+            <a:r>
+              <a:rPr sz="1300">
+                <a:solidFill>
+                  <a:srgbClr val="1C1C1C"/>
+                </a:solidFill>
+                <a:latin typeface="Arial"/>
+              </a:rPr>
+              <a:t/>
+            </a:r>
+          </a:p>
+          <a:p>
+            <a:r>
+              <a:rPr sz="1300">
+                <a:solidFill>
+                  <a:srgbClr val="1C1C1C"/>
+                </a:solidFill>
+                <a:latin typeface="Arial"/>
+              </a:rPr>
+              <a:t>Δ Transfermarkt value = preferred outcome in a pro scouting stack</a:t>
+            </a:r>
+          </a:p>
+          <a:p>
+            <a:r>
+              <a:rPr sz="1300">
+                <a:solidFill>
+                  <a:srgbClr val="1C1C1C"/>
+                </a:solidFill>
+                <a:latin typeface="Arial"/>
+              </a:rPr>
+              <a:t/>
+            </a:r>
+          </a:p>
+          <a:p>
+            <a:r>
+              <a:rPr sz="1300">
+                <a:solidFill>
+                  <a:srgbClr val="1C1C1C"/>
+                </a:solidFill>
+                <a:latin typeface="Arial"/>
+              </a:rPr>
+              <a:t>Same pipeline (stability → traits → outcome) — swap the Y variable</a:t>
+            </a:r>
+          </a:p>
+        </p:txBody>
+      </p:sp>
+    </p:spTree>
+  </p:cSld>
+  <p:clrMapOvr>
+    <a:masterClrMapping/>
+  </p:clrMapOvr>
+</p:sld>
+</file>
+
+<file path=ppt/slides/slide15.xml><?xml version="1.0" encoding="utf-8"?>
+<p:sld xmlns:a="http://schemas.openxmlformats.org/drawingml/2006/main" xmlns:p="http://schemas.openxmlformats.org/presentationml/2006/main" xmlns:r="http://schemas.openxmlformats.org/officeDocument/2006/relationships">
+  <p:cSld>
+    <p:spTree>
+      <p:nvGrpSpPr>
+        <p:cNvPr id="1" name=""/>
+        <p:cNvGrpSpPr/>
+        <p:nvPr/>
+      </p:nvGrpSpPr>
+      <p:grpSpPr/>
+      <p:sp>
+        <p:nvSpPr>
+          <p:cNvPr id="2" name="Rectangle 1"/>
+          <p:cNvSpPr/>
+          <p:nvPr/>
+        </p:nvSpPr>
+        <p:spPr>
+          <a:xfrm>
+            <a:off x="0" y="0"/>
+            <a:ext cx="12191695" cy="6858000"/>
+          </a:xfrm>
+          <a:prstGeom prst="rect">
+            <a:avLst/>
+          </a:prstGeom>
+          <a:solidFill>
+            <a:srgbClr val="F4F5F7"/>
+          </a:solidFill>
+          <a:ln>
+            <a:noFill/>
+          </a:ln>
+        </p:spPr>
+        <p:style>
+          <a:lnRef idx="1">
+            <a:schemeClr val="accent1"/>
+          </a:lnRef>
+          <a:fillRef idx="3">
+            <a:schemeClr val="accent1"/>
+          </a:fillRef>
+          <a:effectRef idx="2">
+            <a:schemeClr val="accent1"/>
+          </a:effectRef>
+          <a:fontRef idx="minor">
+            <a:schemeClr val="lt1"/>
+          </a:fontRef>
+        </p:style>
+        <p:txBody>
+          <a:bodyPr rtlCol="0" anchor="ctr"/>
+          <a:lstStyle/>
+          <a:p>
+            <a:pPr algn="ctr"/>
+          </a:p>
+        </p:txBody>
+      </p:sp>
+      <p:sp>
+        <p:nvSpPr>
+          <p:cNvPr id="3" name="TextBox 2"/>
+          <p:cNvSpPr txBox="1"/>
+          <p:nvPr/>
+        </p:nvSpPr>
+        <p:spPr>
+          <a:xfrm>
+            <a:off x="411480" y="182880"/>
+            <a:ext cx="10972800" cy="256032"/>
+          </a:xfrm>
+          <a:prstGeom prst="rect">
+            <a:avLst/>
+          </a:prstGeom>
+          <a:noFill/>
+        </p:spPr>
+        <p:txBody>
+          <a:bodyPr wrap="square">
+            <a:spAutoFit/>
+          </a:bodyPr>
+          <a:lstStyle/>
+          <a:p>
+            <a:r>
+              <a:rPr sz="1300" b="1">
+                <a:solidFill>
+                  <a:srgbClr val="3D5A80"/>
+                </a:solidFill>
+                <a:latin typeface="Calibri"/>
+              </a:rPr>
+              <a:t>RESULTS  ·  TRAITS → BL SUCCESS</a:t>
+            </a:r>
+          </a:p>
+        </p:txBody>
+      </p:sp>
+      <p:sp>
+        <p:nvSpPr>
+          <p:cNvPr id="4" name="TextBox 3"/>
+          <p:cNvSpPr txBox="1"/>
+          <p:nvPr/>
+        </p:nvSpPr>
+        <p:spPr>
+          <a:xfrm>
+            <a:off x="411480" y="438912"/>
+            <a:ext cx="10972800" cy="320040"/>
+          </a:xfrm>
+          <a:prstGeom prst="rect">
+            <a:avLst/>
+          </a:prstGeom>
+          <a:noFill/>
+        </p:spPr>
+        <p:txBody>
+          <a:bodyPr wrap="square">
+            <a:spAutoFit/>
+          </a:bodyPr>
+          <a:lstStyle/>
+          <a:p>
+            <a:r>
+              <a:rPr sz="2000" b="1">
+                <a:solidFill>
+                  <a:srgbClr val="1C1C1C"/>
+                </a:solidFill>
+                <a:latin typeface="Georgia"/>
+              </a:rPr>
+              <a:t>Prior trait percentiles most indicative of Year-1 minutes (Spearman ρ)</a:t>
+            </a:r>
+          </a:p>
+        </p:txBody>
+      </p:sp>
+      <p:sp>
+        <p:nvSpPr>
+          <p:cNvPr id="5" name="TextBox 4"/>
+          <p:cNvSpPr txBox="1"/>
+          <p:nvPr/>
+        </p:nvSpPr>
+        <p:spPr>
+          <a:xfrm>
+            <a:off x="411480" y="804672"/>
+            <a:ext cx="5486400" cy="274320"/>
+          </a:xfrm>
+          <a:prstGeom prst="rect">
+            <a:avLst/>
+          </a:prstGeom>
+          <a:noFill/>
+        </p:spPr>
+        <p:txBody>
+          <a:bodyPr wrap="square">
+            <a:spAutoFit/>
+          </a:bodyPr>
+          <a:lstStyle/>
+          <a:p>
+            <a:r>
+              <a:rPr sz="1400" b="1">
+                <a:solidFill>
+                  <a:srgbClr val="3D5A80"/>
+                </a:solidFill>
+                <a:latin typeface="Calibri"/>
+              </a:rPr>
+              <a:t>StatsBomb (N=60) — top |ρ|</a:t>
+            </a:r>
+          </a:p>
+        </p:txBody>
+      </p:sp>
+      <p:graphicFrame>
+        <p:nvGraphicFramePr>
+          <p:cNvPr id="6" name="Table 5"/>
+          <p:cNvGraphicFramePr>
+            <a:graphicFrameLocks noGrp="1"/>
+          </p:cNvGraphicFramePr>
+          <p:nvPr/>
+        </p:nvGraphicFramePr>
+        <p:xfrm>
+          <a:off x="411480" y="1097280"/>
+          <a:ext cx="4206240" cy="1792224"/>
+        </p:xfrm>
+        <a:graphic>
+          <a:graphicData uri="http://schemas.openxmlformats.org/drawingml/2006/table">
+            <a:tbl>
+              <a:tblPr firstRow="1" bandRow="1">
+                <a:tableStyleId>{5C22544A-7EE6-4342-B048-85BDC9FD1C3A}</a:tableStyleId>
+              </a:tblPr>
+              <a:tblGrid>
+                <a:gridCol w="2926080"/>
+                <a:gridCol w="640080"/>
+                <a:gridCol w="640080"/>
+              </a:tblGrid>
+              <a:tr h="256032">
+                <a:tc>
+                  <a:txBody>
+                    <a:bodyPr/>
+                    <a:lstStyle/>
+                    <a:p>
+                      <a:pPr>
+                        <a:defRPr sz="1000" b="1">
+                          <a:solidFill>
+                            <a:srgbClr val="FFFFFF"/>
+                          </a:solidFill>
+                          <a:latin typeface="Calibri"/>
+                        </a:defRPr>
+                      </a:pPr>
+                      <a:r>
+                        <a:t>Trait</a:t>
+                      </a:r>
+                    </a:p>
+                  </a:txBody>
+                  <a:tcPr>
+                    <a:solidFill>
+                      <a:srgbClr val="1C1C1C"/>
+                    </a:solidFill>
+                  </a:tcPr>
+                </a:tc>
+                <a:tc>
+                  <a:txBody>
+                    <a:bodyPr/>
+                    <a:lstStyle/>
+                    <a:p>
+                      <a:pPr>
+                        <a:defRPr sz="1000" b="1">
+                          <a:solidFill>
+                            <a:srgbClr val="FFFFFF"/>
+                          </a:solidFill>
+                          <a:latin typeface="Calibri"/>
+                        </a:defRPr>
+                      </a:pPr>
+                      <a:r>
+                        <a:t>ρ</a:t>
+                      </a:r>
+                    </a:p>
+                  </a:txBody>
+                  <a:tcPr>
+                    <a:solidFill>
+                      <a:srgbClr val="1C1C1C"/>
+                    </a:solidFill>
+                  </a:tcPr>
+                </a:tc>
+                <a:tc>
+                  <a:txBody>
+                    <a:bodyPr/>
+                    <a:lstStyle/>
+                    <a:p>
+                      <a:pPr>
+                        <a:defRPr sz="1000" b="1">
+                          <a:solidFill>
+                            <a:srgbClr val="FFFFFF"/>
+                          </a:solidFill>
+                          <a:latin typeface="Calibri"/>
+                        </a:defRPr>
+                      </a:pPr>
+                      <a:r>
+                        <a:t>p</a:t>
+                      </a:r>
+                    </a:p>
+                  </a:txBody>
+                  <a:tcPr>
+                    <a:solidFill>
+                      <a:srgbClr val="1C1C1C"/>
+                    </a:solidFill>
+                  </a:tcPr>
+                </a:tc>
+              </a:tr>
+              <a:tr h="256032">
+                <a:tc>
+                  <a:txBody>
+                    <a:bodyPr/>
+                    <a:lstStyle/>
+                    <a:p>
+                      <a:pPr>
+                        <a:defRPr sz="1000" b="0">
+                          <a:solidFill>
+                            <a:srgbClr val="1C1C1C"/>
+                          </a:solidFill>
+                          <a:latin typeface="Calibri"/>
+                        </a:defRPr>
+                      </a:pPr>
+                      <a:r>
+                        <a:t>DRB — Successful dribbles</a:t>
+                      </a:r>
+                    </a:p>
+                  </a:txBody>
+                  <a:tcPr>
+                    <a:solidFill>
+                      <a:srgbClr val="F0FAF4"/>
+                    </a:solidFill>
+                  </a:tcPr>
+                </a:tc>
+                <a:tc>
+                  <a:txBody>
+                    <a:bodyPr/>
+                    <a:lstStyle/>
+                    <a:p>
+                      <a:pPr>
+                        <a:defRPr sz="1000" b="0">
+                          <a:solidFill>
+                            <a:srgbClr val="1C1C1C"/>
+                          </a:solidFill>
+                          <a:latin typeface="Calibri"/>
+                        </a:defRPr>
+                      </a:pPr>
+                      <a:r>
+                        <a:t>-0.30</a:t>
+                      </a:r>
+                    </a:p>
+                  </a:txBody>
+                  <a:tcPr>
+                    <a:solidFill>
+                      <a:srgbClr val="F0FAF4"/>
+                    </a:solidFill>
+                  </a:tcPr>
+                </a:tc>
+                <a:tc>
+                  <a:txBody>
+                    <a:bodyPr/>
+                    <a:lstStyle/>
+                    <a:p>
+                      <a:pPr>
+                        <a:defRPr sz="1000" b="0">
+                          <a:solidFill>
+                            <a:srgbClr val="1C1C1C"/>
+                          </a:solidFill>
+                          <a:latin typeface="Calibri"/>
+                        </a:defRPr>
+                      </a:pPr>
+                      <a:r>
+                        <a:t>0.021</a:t>
+                      </a:r>
+                    </a:p>
+                  </a:txBody>
+                  <a:tcPr>
+                    <a:solidFill>
+                      <a:srgbClr val="F0FAF4"/>
+                    </a:solidFill>
+                  </a:tcPr>
+                </a:tc>
+              </a:tr>
+              <a:tr h="256032">
+                <a:tc>
+                  <a:txBody>
+                    <a:bodyPr/>
+                    <a:lstStyle/>
+                    <a:p>
+                      <a:pPr>
+                        <a:defRPr sz="1000" b="0">
+                          <a:solidFill>
+                            <a:srgbClr val="1C1C1C"/>
+                          </a:solidFill>
+                          <a:latin typeface="Calibri"/>
+                        </a:defRPr>
+                      </a:pPr>
+                      <a:r>
+                        <a:t>DIS — Dispossessed (inverted)</a:t>
+                      </a:r>
+                    </a:p>
+                  </a:txBody>
+                  <a:tcPr>
+                    <a:solidFill>
+                      <a:srgbClr val="FFFFFF"/>
+                    </a:solidFill>
+                  </a:tcPr>
+                </a:tc>
+                <a:tc>
+                  <a:txBody>
+                    <a:bodyPr/>
+                    <a:lstStyle/>
+                    <a:p>
+                      <a:pPr>
+                        <a:defRPr sz="1000" b="0">
+                          <a:solidFill>
+                            <a:srgbClr val="1C1C1C"/>
+                          </a:solidFill>
+                          <a:latin typeface="Calibri"/>
+                        </a:defRPr>
+                      </a:pPr>
+                      <a:r>
+                        <a:t>0.29</a:t>
+                      </a:r>
+                    </a:p>
+                  </a:txBody>
+                  <a:tcPr>
+                    <a:solidFill>
+                      <a:srgbClr val="FFFFFF"/>
+                    </a:solidFill>
+                  </a:tcPr>
+                </a:tc>
+                <a:tc>
+                  <a:txBody>
+                    <a:bodyPr/>
+                    <a:lstStyle/>
+                    <a:p>
+                      <a:pPr>
+                        <a:defRPr sz="1000" b="0">
+                          <a:solidFill>
+                            <a:srgbClr val="1C1C1C"/>
+                          </a:solidFill>
+                          <a:latin typeface="Calibri"/>
+                        </a:defRPr>
+                      </a:pPr>
+                      <a:r>
+                        <a:t>0.026</a:t>
+                      </a:r>
+                    </a:p>
+                  </a:txBody>
+                  <a:tcPr>
+                    <a:solidFill>
+                      <a:srgbClr val="FFFFFF"/>
+                    </a:solidFill>
+                  </a:tcPr>
+                </a:tc>
+              </a:tr>
+              <a:tr h="256032">
+                <a:tc>
+                  <a:txBody>
+                    <a:bodyPr/>
+                    <a:lstStyle/>
+                    <a:p>
+                      <a:pPr>
+                        <a:defRPr sz="1000" b="0">
+                          <a:solidFill>
+                            <a:srgbClr val="1C1C1C"/>
+                          </a:solidFill>
+                          <a:latin typeface="Calibri"/>
+                        </a:defRPr>
+                      </a:pPr>
+                      <a:r>
+                        <a:t>PRS — Pressures</a:t>
+                      </a:r>
+                    </a:p>
+                  </a:txBody>
+                  <a:tcPr>
+                    <a:solidFill>
+                      <a:srgbClr val="F0FAF4"/>
+                    </a:solidFill>
+                  </a:tcPr>
+                </a:tc>
+                <a:tc>
+                  <a:txBody>
+                    <a:bodyPr/>
+                    <a:lstStyle/>
+                    <a:p>
+                      <a:pPr>
+                        <a:defRPr sz="1000" b="0">
+                          <a:solidFill>
+                            <a:srgbClr val="1C1C1C"/>
+                          </a:solidFill>
+                          <a:latin typeface="Calibri"/>
+                        </a:defRPr>
+                      </a:pPr>
+                      <a:r>
+                        <a:t>-0.29</a:t>
+                      </a:r>
+                    </a:p>
+                  </a:txBody>
+                  <a:tcPr>
+                    <a:solidFill>
+                      <a:srgbClr val="F0FAF4"/>
+                    </a:solidFill>
+                  </a:tcPr>
+                </a:tc>
+                <a:tc>
+                  <a:txBody>
+                    <a:bodyPr/>
+                    <a:lstStyle/>
+                    <a:p>
+                      <a:pPr>
+                        <a:defRPr sz="1000" b="0">
+                          <a:solidFill>
+                            <a:srgbClr val="1C1C1C"/>
+                          </a:solidFill>
+                          <a:latin typeface="Calibri"/>
+                        </a:defRPr>
+                      </a:pPr>
+                      <a:r>
+                        <a:t>0.026</a:t>
+                      </a:r>
+                    </a:p>
+                  </a:txBody>
+                  <a:tcPr>
+                    <a:solidFill>
+                      <a:srgbClr val="F0FAF4"/>
+                    </a:solidFill>
+                  </a:tcPr>
+                </a:tc>
+              </a:tr>
+              <a:tr h="256032">
+                <a:tc>
+                  <a:txBody>
+                    <a:bodyPr/>
+                    <a:lstStyle/>
+                    <a:p>
+                      <a:pPr>
+                        <a:defRPr sz="1000" b="0">
+                          <a:solidFill>
+                            <a:srgbClr val="1C1C1C"/>
+                          </a:solidFill>
+                          <a:latin typeface="Calibri"/>
+                        </a:defRPr>
+                      </a:pPr>
+                      <a:r>
+                        <a:t>PPC — Progressive passes (~10m+ to</a:t>
+                      </a:r>
+                    </a:p>
+                  </a:txBody>
+                  <a:tcPr>
+                    <a:solidFill>
+                      <a:srgbClr val="FFFFFF"/>
+                    </a:solidFill>
+                  </a:tcPr>
+                </a:tc>
+                <a:tc>
+                  <a:txBody>
+                    <a:bodyPr/>
+                    <a:lstStyle/>
+                    <a:p>
+                      <a:pPr>
+                        <a:defRPr sz="1000" b="0">
+                          <a:solidFill>
+                            <a:srgbClr val="1C1C1C"/>
+                          </a:solidFill>
+                          <a:latin typeface="Calibri"/>
+                        </a:defRPr>
+                      </a:pPr>
+                      <a:r>
+                        <a:t>0.22</a:t>
+                      </a:r>
+                    </a:p>
+                  </a:txBody>
+                  <a:tcPr>
+                    <a:solidFill>
+                      <a:srgbClr val="FFFFFF"/>
+                    </a:solidFill>
+                  </a:tcPr>
+                </a:tc>
+                <a:tc>
+                  <a:txBody>
+                    <a:bodyPr/>
+                    <a:lstStyle/>
+                    <a:p>
+                      <a:pPr>
+                        <a:defRPr sz="1000" b="0">
+                          <a:solidFill>
+                            <a:srgbClr val="1C1C1C"/>
+                          </a:solidFill>
+                          <a:latin typeface="Calibri"/>
+                        </a:defRPr>
+                      </a:pPr>
+                      <a:r>
+                        <a:t>0.092</a:t>
+                      </a:r>
+                    </a:p>
+                  </a:txBody>
+                  <a:tcPr>
+                    <a:solidFill>
+                      <a:srgbClr val="FFFFFF"/>
+                    </a:solidFill>
+                  </a:tcPr>
+                </a:tc>
+              </a:tr>
+              <a:tr h="256032">
+                <a:tc>
+                  <a:txBody>
+                    <a:bodyPr/>
+                    <a:lstStyle/>
+                    <a:p>
+                      <a:pPr>
+                        <a:defRPr sz="1000" b="0">
+                          <a:solidFill>
+                            <a:srgbClr val="1C1C1C"/>
+                          </a:solidFill>
+                          <a:latin typeface="Calibri"/>
+                        </a:defRPr>
+                      </a:pPr>
+                      <a:r>
+                        <a:t>PATT — Passes into final third</a:t>
+                      </a:r>
+                    </a:p>
+                  </a:txBody>
+                  <a:tcPr>
+                    <a:solidFill>
+                      <a:srgbClr val="F0FAF4"/>
+                    </a:solidFill>
+                  </a:tcPr>
+                </a:tc>
+                <a:tc>
+                  <a:txBody>
+                    <a:bodyPr/>
+                    <a:lstStyle/>
+                    <a:p>
+                      <a:pPr>
+                        <a:defRPr sz="1000" b="0">
+                          <a:solidFill>
+                            <a:srgbClr val="1C1C1C"/>
+                          </a:solidFill>
+                          <a:latin typeface="Calibri"/>
+                        </a:defRPr>
+                      </a:pPr>
+                      <a:r>
+                        <a:t>-0.21</a:t>
+                      </a:r>
+                    </a:p>
+                  </a:txBody>
+                  <a:tcPr>
+                    <a:solidFill>
+                      <a:srgbClr val="F0FAF4"/>
+                    </a:solidFill>
+                  </a:tcPr>
+                </a:tc>
+                <a:tc>
+                  <a:txBody>
+                    <a:bodyPr/>
+                    <a:lstStyle/>
+                    <a:p>
+                      <a:pPr>
+                        <a:defRPr sz="1000" b="0">
+                          <a:solidFill>
+                            <a:srgbClr val="1C1C1C"/>
+                          </a:solidFill>
+                          <a:latin typeface="Calibri"/>
+                        </a:defRPr>
+                      </a:pPr>
+                      <a:r>
+                        <a:t>0.104</a:t>
+                      </a:r>
+                    </a:p>
+                  </a:txBody>
+                  <a:tcPr>
+                    <a:solidFill>
+                      <a:srgbClr val="F0FAF4"/>
+                    </a:solidFill>
+                  </a:tcPr>
+                </a:tc>
+              </a:tr>
+              <a:tr h="256032">
+                <a:tc>
+                  <a:txBody>
+                    <a:bodyPr/>
+                    <a:lstStyle/>
+                    <a:p>
+                      <a:pPr>
+                        <a:defRPr sz="1000" b="0">
+                          <a:solidFill>
+                            <a:srgbClr val="1C1C1C"/>
+                          </a:solidFill>
+                          <a:latin typeface="Calibri"/>
+                        </a:defRPr>
+                      </a:pPr>
+                      <a:r>
+                        <a:t>XG — Non-pen xG</a:t>
+                      </a:r>
+                    </a:p>
+                  </a:txBody>
+                  <a:tcPr>
+                    <a:solidFill>
+                      <a:srgbClr val="FFFFFF"/>
+                    </a:solidFill>
+                  </a:tcPr>
+                </a:tc>
+                <a:tc>
+                  <a:txBody>
+                    <a:bodyPr/>
+                    <a:lstStyle/>
+                    <a:p>
+                      <a:pPr>
+                        <a:defRPr sz="1000" b="0">
+                          <a:solidFill>
+                            <a:srgbClr val="1C1C1C"/>
+                          </a:solidFill>
+                          <a:latin typeface="Calibri"/>
+                        </a:defRPr>
+                      </a:pPr>
+                      <a:r>
+                        <a:t>-0.17</a:t>
+                      </a:r>
+                    </a:p>
+                  </a:txBody>
+                  <a:tcPr>
+                    <a:solidFill>
+                      <a:srgbClr val="FFFFFF"/>
+                    </a:solidFill>
+                  </a:tcPr>
+                </a:tc>
+                <a:tc>
+                  <a:txBody>
+                    <a:bodyPr/>
+                    <a:lstStyle/>
+                    <a:p>
+                      <a:pPr>
+                        <a:defRPr sz="1000" b="0">
+                          <a:solidFill>
+                            <a:srgbClr val="1C1C1C"/>
+                          </a:solidFill>
+                          <a:latin typeface="Calibri"/>
+                        </a:defRPr>
+                      </a:pPr>
+                      <a:r>
+                        <a:t>0.204</a:t>
+                      </a:r>
+                    </a:p>
+                  </a:txBody>
+                  <a:tcPr>
+                    <a:solidFill>
+                      <a:srgbClr val="FFFFFF"/>
+                    </a:solidFill>
+                  </a:tcPr>
+                </a:tc>
+              </a:tr>
+            </a:tbl>
+          </a:graphicData>
+        </a:graphic>
+      </p:graphicFrame>
+      <p:sp>
+        <p:nvSpPr>
+          <p:cNvPr id="7" name="TextBox 6"/>
+          <p:cNvSpPr txBox="1"/>
+          <p:nvPr/>
+        </p:nvSpPr>
+        <p:spPr>
+          <a:xfrm>
+            <a:off x="6126480" y="804672"/>
+            <a:ext cx="5486400" cy="274320"/>
+          </a:xfrm>
+          <a:prstGeom prst="rect">
+            <a:avLst/>
+          </a:prstGeom>
+          <a:noFill/>
+        </p:spPr>
+        <p:txBody>
+          <a:bodyPr wrap="square">
+            <a:spAutoFit/>
+          </a:bodyPr>
+          <a:lstStyle/>
+          <a:p>
+            <a:r>
+              <a:rPr sz="1400" b="1">
+                <a:solidFill>
+                  <a:srgbClr val="1B7A45"/>
+                </a:solidFill>
+                <a:latin typeface="Calibri"/>
+              </a:rPr>
+              <a:t>FBref Big 5 (N=117) — significant traits</a:t>
+            </a:r>
+          </a:p>
+        </p:txBody>
+      </p:sp>
+      <p:graphicFrame>
+        <p:nvGraphicFramePr>
+          <p:cNvPr id="8" name="Table 7"/>
+          <p:cNvGraphicFramePr>
+            <a:graphicFrameLocks noGrp="1"/>
+          </p:cNvGraphicFramePr>
+          <p:nvPr/>
+        </p:nvGraphicFramePr>
+        <p:xfrm>
+          <a:off x="6126480" y="1097280"/>
+          <a:ext cx="3931920" cy="2304288"/>
+        </p:xfrm>
+        <a:graphic>
+          <a:graphicData uri="http://schemas.openxmlformats.org/drawingml/2006/table">
+            <a:tbl>
+              <a:tblPr firstRow="1" bandRow="1">
+                <a:tableStyleId>{5C22544A-7EE6-4342-B048-85BDC9FD1C3A}</a:tableStyleId>
+              </a:tblPr>
+              <a:tblGrid>
+                <a:gridCol w="2743200"/>
+                <a:gridCol w="594360"/>
+                <a:gridCol w="594360"/>
+              </a:tblGrid>
+              <a:tr h="256032">
+                <a:tc>
+                  <a:txBody>
+                    <a:bodyPr/>
+                    <a:lstStyle/>
+                    <a:p>
+                      <a:pPr>
+                        <a:defRPr sz="1000" b="1">
+                          <a:solidFill>
+                            <a:srgbClr val="FFFFFF"/>
+                          </a:solidFill>
+                          <a:latin typeface="Calibri"/>
+                        </a:defRPr>
+                      </a:pPr>
+                      <a:r>
+                        <a:t>Trait</a:t>
+                      </a:r>
+                    </a:p>
+                  </a:txBody>
+                  <a:tcPr>
+                    <a:solidFill>
+                      <a:srgbClr val="1C1C1C"/>
+                    </a:solidFill>
+                  </a:tcPr>
+                </a:tc>
+                <a:tc>
+                  <a:txBody>
+                    <a:bodyPr/>
+                    <a:lstStyle/>
+                    <a:p>
+                      <a:pPr>
+                        <a:defRPr sz="1000" b="1">
+                          <a:solidFill>
+                            <a:srgbClr val="FFFFFF"/>
+                          </a:solidFill>
+                          <a:latin typeface="Calibri"/>
+                        </a:defRPr>
+                      </a:pPr>
+                      <a:r>
+                        <a:t>ρ</a:t>
+                      </a:r>
+                    </a:p>
+                  </a:txBody>
+                  <a:tcPr>
+                    <a:solidFill>
+                      <a:srgbClr val="1C1C1C"/>
+                    </a:solidFill>
+                  </a:tcPr>
+                </a:tc>
+                <a:tc>
+                  <a:txBody>
+                    <a:bodyPr/>
+                    <a:lstStyle/>
+                    <a:p>
+                      <a:pPr>
+                        <a:defRPr sz="1000" b="1">
+                          <a:solidFill>
+                            <a:srgbClr val="FFFFFF"/>
+                          </a:solidFill>
+                          <a:latin typeface="Calibri"/>
+                        </a:defRPr>
+                      </a:pPr>
+                      <a:r>
+                        <a:t>p</a:t>
+                      </a:r>
+                    </a:p>
+                  </a:txBody>
+                  <a:tcPr>
+                    <a:solidFill>
+                      <a:srgbClr val="1C1C1C"/>
+                    </a:solidFill>
+                  </a:tcPr>
+                </a:tc>
+              </a:tr>
+              <a:tr h="256032">
+                <a:tc>
+                  <a:txBody>
+                    <a:bodyPr/>
+                    <a:lstStyle/>
+                    <a:p>
+                      <a:pPr>
+                        <a:defRPr sz="1000" b="0">
+                          <a:solidFill>
+                            <a:srgbClr val="1C1C1C"/>
+                          </a:solidFill>
+                          <a:latin typeface="Calibri"/>
+                        </a:defRPr>
+                      </a:pPr>
+                      <a:r>
+                        <a:t>LOST — Lost Aerial*</a:t>
+                      </a:r>
+                    </a:p>
+                  </a:txBody>
+                  <a:tcPr>
+                    <a:solidFill>
+                      <a:srgbClr val="F0FAF4"/>
+                    </a:solidFill>
+                  </a:tcPr>
+                </a:tc>
+                <a:tc>
+                  <a:txBody>
+                    <a:bodyPr/>
+                    <a:lstStyle/>
+                    <a:p>
+                      <a:pPr>
+                        <a:defRPr sz="1000" b="0">
+                          <a:solidFill>
+                            <a:srgbClr val="1C1C1C"/>
+                          </a:solidFill>
+                          <a:latin typeface="Calibri"/>
+                        </a:defRPr>
+                      </a:pPr>
+                      <a:r>
+                        <a:t>0.25</a:t>
+                      </a:r>
+                    </a:p>
+                  </a:txBody>
+                  <a:tcPr>
+                    <a:solidFill>
+                      <a:srgbClr val="F0FAF4"/>
+                    </a:solidFill>
+                  </a:tcPr>
+                </a:tc>
+                <a:tc>
+                  <a:txBody>
+                    <a:bodyPr/>
+                    <a:lstStyle/>
+                    <a:p>
+                      <a:pPr>
+                        <a:defRPr sz="1000" b="0">
+                          <a:solidFill>
+                            <a:srgbClr val="1C1C1C"/>
+                          </a:solidFill>
+                          <a:latin typeface="Calibri"/>
+                        </a:defRPr>
+                      </a:pPr>
+                      <a:r>
+                        <a:t>0.007</a:t>
+                      </a:r>
+                    </a:p>
+                  </a:txBody>
+                  <a:tcPr>
+                    <a:solidFill>
+                      <a:srgbClr val="F0FAF4"/>
+                    </a:solidFill>
+                  </a:tcPr>
+                </a:tc>
+              </a:tr>
+              <a:tr h="256032">
+                <a:tc>
+                  <a:txBody>
+                    <a:bodyPr/>
+                    <a:lstStyle/>
+                    <a:p>
+                      <a:pPr>
+                        <a:defRPr sz="1000" b="0">
+                          <a:solidFill>
+                            <a:srgbClr val="1C1C1C"/>
+                          </a:solidFill>
+                          <a:latin typeface="Calibri"/>
+                        </a:defRPr>
+                      </a:pPr>
+                      <a:r>
+                        <a:t>FINAL — Final Third*</a:t>
+                      </a:r>
+                    </a:p>
+                  </a:txBody>
+                  <a:tcPr>
+                    <a:solidFill>
+                      <a:srgbClr val="FFFFFF"/>
+                    </a:solidFill>
+                  </a:tcPr>
+                </a:tc>
+                <a:tc>
+                  <a:txBody>
+                    <a:bodyPr/>
+                    <a:lstStyle/>
+                    <a:p>
+                      <a:pPr>
+                        <a:defRPr sz="1000" b="0">
+                          <a:solidFill>
+                            <a:srgbClr val="1C1C1C"/>
+                          </a:solidFill>
+                          <a:latin typeface="Calibri"/>
+                        </a:defRPr>
+                      </a:pPr>
+                      <a:r>
+                        <a:t>0.24</a:t>
+                      </a:r>
+                    </a:p>
+                  </a:txBody>
+                  <a:tcPr>
+                    <a:solidFill>
+                      <a:srgbClr val="FFFFFF"/>
+                    </a:solidFill>
+                  </a:tcPr>
+                </a:tc>
+                <a:tc>
+                  <a:txBody>
+                    <a:bodyPr/>
+                    <a:lstStyle/>
+                    <a:p>
+                      <a:pPr>
+                        <a:defRPr sz="1000" b="0">
+                          <a:solidFill>
+                            <a:srgbClr val="1C1C1C"/>
+                          </a:solidFill>
+                          <a:latin typeface="Calibri"/>
+                        </a:defRPr>
+                      </a:pPr>
+                      <a:r>
+                        <a:t>0.008</a:t>
+                      </a:r>
+                    </a:p>
+                  </a:txBody>
+                  <a:tcPr>
+                    <a:solidFill>
+                      <a:srgbClr val="FFFFFF"/>
+                    </a:solidFill>
+                  </a:tcPr>
+                </a:tc>
+              </a:tr>
+              <a:tr h="256032">
+                <a:tc>
+                  <a:txBody>
+                    <a:bodyPr/>
+                    <a:lstStyle/>
+                    <a:p>
+                      <a:pPr>
+                        <a:defRPr sz="1000" b="0">
+                          <a:solidFill>
+                            <a:srgbClr val="1C1C1C"/>
+                          </a:solidFill>
+                          <a:latin typeface="Calibri"/>
+                        </a:defRPr>
+                      </a:pPr>
+                      <a:r>
+                        <a:t>SH — Sh Blocks*</a:t>
+                      </a:r>
+                    </a:p>
+                  </a:txBody>
+                  <a:tcPr>
+                    <a:solidFill>
+                      <a:srgbClr val="F0FAF4"/>
+                    </a:solidFill>
+                  </a:tcPr>
+                </a:tc>
+                <a:tc>
+                  <a:txBody>
+                    <a:bodyPr/>
+                    <a:lstStyle/>
+                    <a:p>
+                      <a:pPr>
+                        <a:defRPr sz="1000" b="0">
+                          <a:solidFill>
+                            <a:srgbClr val="1C1C1C"/>
+                          </a:solidFill>
+                          <a:latin typeface="Calibri"/>
+                        </a:defRPr>
+                      </a:pPr>
+                      <a:r>
+                        <a:t>0.23</a:t>
+                      </a:r>
+                    </a:p>
+                  </a:txBody>
+                  <a:tcPr>
+                    <a:solidFill>
+                      <a:srgbClr val="F0FAF4"/>
+                    </a:solidFill>
+                  </a:tcPr>
+                </a:tc>
+                <a:tc>
+                  <a:txBody>
+                    <a:bodyPr/>
+                    <a:lstStyle/>
+                    <a:p>
+                      <a:pPr>
+                        <a:defRPr sz="1000" b="0">
+                          <a:solidFill>
+                            <a:srgbClr val="1C1C1C"/>
+                          </a:solidFill>
+                          <a:latin typeface="Calibri"/>
+                        </a:defRPr>
+                      </a:pPr>
+                      <a:r>
+                        <a:t>0.011</a:t>
+                      </a:r>
+                    </a:p>
+                  </a:txBody>
+                  <a:tcPr>
+                    <a:solidFill>
+                      <a:srgbClr val="F0FAF4"/>
+                    </a:solidFill>
+                  </a:tcPr>
+                </a:tc>
+              </a:tr>
+              <a:tr h="256032">
+                <a:tc>
+                  <a:txBody>
+                    <a:bodyPr/>
+                    <a:lstStyle/>
+                    <a:p>
+                      <a:pPr>
+                        <a:defRPr sz="1000" b="0">
+                          <a:solidFill>
+                            <a:srgbClr val="1C1C1C"/>
+                          </a:solidFill>
+                          <a:latin typeface="Calibri"/>
+                        </a:defRPr>
+                      </a:pPr>
+                      <a:r>
+                        <a:t>DEFPE — Def Pen Touches*</a:t>
+                      </a:r>
+                    </a:p>
+                  </a:txBody>
+                  <a:tcPr>
+                    <a:solidFill>
+                      <a:srgbClr val="FFFFFF"/>
+                    </a:solidFill>
+                  </a:tcPr>
+                </a:tc>
+                <a:tc>
+                  <a:txBody>
+                    <a:bodyPr/>
+                    <a:lstStyle/>
+                    <a:p>
+                      <a:pPr>
+                        <a:defRPr sz="1000" b="0">
+                          <a:solidFill>
+                            <a:srgbClr val="1C1C1C"/>
+                          </a:solidFill>
+                          <a:latin typeface="Calibri"/>
+                        </a:defRPr>
+                      </a:pPr>
+                      <a:r>
+                        <a:t>0.20</a:t>
+                      </a:r>
+                    </a:p>
+                  </a:txBody>
+                  <a:tcPr>
+                    <a:solidFill>
+                      <a:srgbClr val="FFFFFF"/>
+                    </a:solidFill>
+                  </a:tcPr>
+                </a:tc>
+                <a:tc>
+                  <a:txBody>
+                    <a:bodyPr/>
+                    <a:lstStyle/>
+                    <a:p>
+                      <a:pPr>
+                        <a:defRPr sz="1000" b="0">
+                          <a:solidFill>
+                            <a:srgbClr val="1C1C1C"/>
+                          </a:solidFill>
+                          <a:latin typeface="Calibri"/>
+                        </a:defRPr>
+                      </a:pPr>
+                      <a:r>
+                        <a:t>0.035</a:t>
+                      </a:r>
+                    </a:p>
+                  </a:txBody>
+                  <a:tcPr>
+                    <a:solidFill>
+                      <a:srgbClr val="FFFFFF"/>
+                    </a:solidFill>
+                  </a:tcPr>
+                </a:tc>
+              </a:tr>
+              <a:tr h="256032">
+                <a:tc>
+                  <a:txBody>
+                    <a:bodyPr/>
+                    <a:lstStyle/>
+                    <a:p>
+                      <a:pPr>
+                        <a:defRPr sz="1000" b="0">
+                          <a:solidFill>
+                            <a:srgbClr val="1C1C1C"/>
+                          </a:solidFill>
+                          <a:latin typeface="Calibri"/>
+                        </a:defRPr>
+                      </a:pPr>
+                      <a:r>
+                        <a:t>WONPE — Won percent Aerial</a:t>
+                      </a:r>
+                    </a:p>
+                  </a:txBody>
+                  <a:tcPr>
+                    <a:solidFill>
+                      <a:srgbClr val="F0FAF4"/>
+                    </a:solidFill>
+                  </a:tcPr>
+                </a:tc>
+                <a:tc>
+                  <a:txBody>
+                    <a:bodyPr/>
+                    <a:lstStyle/>
+                    <a:p>
+                      <a:pPr>
+                        <a:defRPr sz="1000" b="0">
+                          <a:solidFill>
+                            <a:srgbClr val="1C1C1C"/>
+                          </a:solidFill>
+                          <a:latin typeface="Calibri"/>
+                        </a:defRPr>
+                      </a:pPr>
+                      <a:r>
+                        <a:t>0.17</a:t>
+                      </a:r>
+                    </a:p>
+                  </a:txBody>
+                  <a:tcPr>
+                    <a:solidFill>
+                      <a:srgbClr val="F0FAF4"/>
+                    </a:solidFill>
+                  </a:tcPr>
+                </a:tc>
+                <a:tc>
+                  <a:txBody>
+                    <a:bodyPr/>
+                    <a:lstStyle/>
+                    <a:p>
+                      <a:pPr>
+                        <a:defRPr sz="1000" b="0">
+                          <a:solidFill>
+                            <a:srgbClr val="1C1C1C"/>
+                          </a:solidFill>
+                          <a:latin typeface="Calibri"/>
+                        </a:defRPr>
+                      </a:pPr>
+                      <a:r>
+                        <a:t>0.062</a:t>
+                      </a:r>
+                    </a:p>
+                  </a:txBody>
+                  <a:tcPr>
+                    <a:solidFill>
+                      <a:srgbClr val="F0FAF4"/>
+                    </a:solidFill>
+                  </a:tcPr>
+                </a:tc>
+              </a:tr>
+              <a:tr h="256032">
+                <a:tc>
+                  <a:txBody>
+                    <a:bodyPr/>
+                    <a:lstStyle/>
+                    <a:p>
+                      <a:pPr>
+                        <a:defRPr sz="1000" b="0">
+                          <a:solidFill>
+                            <a:srgbClr val="1C1C1C"/>
+                          </a:solidFill>
+                          <a:latin typeface="Calibri"/>
+                        </a:defRPr>
+                      </a:pPr>
+                      <a:r>
+                        <a:t>PRGDI — PrgDist Total</a:t>
+                      </a:r>
+                    </a:p>
+                  </a:txBody>
+                  <a:tcPr>
+                    <a:solidFill>
+                      <a:srgbClr val="FFFFFF"/>
+                    </a:solidFill>
+                  </a:tcPr>
+                </a:tc>
+                <a:tc>
+                  <a:txBody>
+                    <a:bodyPr/>
+                    <a:lstStyle/>
+                    <a:p>
+                      <a:pPr>
+                        <a:defRPr sz="1000" b="0">
+                          <a:solidFill>
+                            <a:srgbClr val="1C1C1C"/>
+                          </a:solidFill>
+                          <a:latin typeface="Calibri"/>
+                        </a:defRPr>
+                      </a:pPr>
+                      <a:r>
+                        <a:t>0.17</a:t>
+                      </a:r>
+                    </a:p>
+                  </a:txBody>
+                  <a:tcPr>
+                    <a:solidFill>
+                      <a:srgbClr val="FFFFFF"/>
+                    </a:solidFill>
+                  </a:tcPr>
+                </a:tc>
+                <a:tc>
+                  <a:txBody>
+                    <a:bodyPr/>
+                    <a:lstStyle/>
+                    <a:p>
+                      <a:pPr>
+                        <a:defRPr sz="1000" b="0">
+                          <a:solidFill>
+                            <a:srgbClr val="1C1C1C"/>
+                          </a:solidFill>
+                          <a:latin typeface="Calibri"/>
+                        </a:defRPr>
+                      </a:pPr>
+                      <a:r>
+                        <a:t>0.073</a:t>
+                      </a:r>
+                    </a:p>
+                  </a:txBody>
+                  <a:tcPr>
+                    <a:solidFill>
+                      <a:srgbClr val="FFFFFF"/>
+                    </a:solidFill>
+                  </a:tcPr>
+                </a:tc>
+              </a:tr>
+              <a:tr h="256032">
+                <a:tc>
+                  <a:txBody>
+                    <a:bodyPr/>
+                    <a:lstStyle/>
+                    <a:p>
+                      <a:pPr>
+                        <a:defRPr sz="1000" b="0">
+                          <a:solidFill>
+                            <a:srgbClr val="1C1C1C"/>
+                          </a:solidFill>
+                          <a:latin typeface="Calibri"/>
+                        </a:defRPr>
+                      </a:pPr>
+                      <a:r>
+                        <a:t>MIS — Mis Carries</a:t>
+                      </a:r>
+                    </a:p>
+                  </a:txBody>
+                  <a:tcPr>
+                    <a:solidFill>
+                      <a:srgbClr val="F0FAF4"/>
+                    </a:solidFill>
+                  </a:tcPr>
+                </a:tc>
+                <a:tc>
+                  <a:txBody>
+                    <a:bodyPr/>
+                    <a:lstStyle/>
+                    <a:p>
+                      <a:pPr>
+                        <a:defRPr sz="1000" b="0">
+                          <a:solidFill>
+                            <a:srgbClr val="1C1C1C"/>
+                          </a:solidFill>
+                          <a:latin typeface="Calibri"/>
+                        </a:defRPr>
+                      </a:pPr>
+                      <a:r>
+                        <a:t>0.16</a:t>
+                      </a:r>
+                    </a:p>
+                  </a:txBody>
+                  <a:tcPr>
+                    <a:solidFill>
+                      <a:srgbClr val="F0FAF4"/>
+                    </a:solidFill>
+                  </a:tcPr>
+                </a:tc>
+                <a:tc>
+                  <a:txBody>
+                    <a:bodyPr/>
+                    <a:lstStyle/>
+                    <a:p>
+                      <a:pPr>
+                        <a:defRPr sz="1000" b="0">
+                          <a:solidFill>
+                            <a:srgbClr val="1C1C1C"/>
+                          </a:solidFill>
+                          <a:latin typeface="Calibri"/>
+                        </a:defRPr>
+                      </a:pPr>
+                      <a:r>
+                        <a:t>0.078</a:t>
+                      </a:r>
+                    </a:p>
+                  </a:txBody>
+                  <a:tcPr>
+                    <a:solidFill>
+                      <a:srgbClr val="F0FAF4"/>
+                    </a:solidFill>
+                  </a:tcPr>
+                </a:tc>
+              </a:tr>
+              <a:tr h="256032">
+                <a:tc>
+                  <a:txBody>
+                    <a:bodyPr/>
+                    <a:lstStyle/>
+                    <a:p>
+                      <a:pPr>
+                        <a:defRPr sz="1000" b="0">
+                          <a:solidFill>
+                            <a:srgbClr val="1C1C1C"/>
+                          </a:solidFill>
+                          <a:latin typeface="Calibri"/>
+                        </a:defRPr>
+                      </a:pPr>
+                      <a:r>
+                        <a:t>CLR — Clr</a:t>
+                      </a:r>
+                    </a:p>
+                  </a:txBody>
+                  <a:tcPr>
+                    <a:solidFill>
+                      <a:srgbClr val="FFFFFF"/>
+                    </a:solidFill>
+                  </a:tcPr>
+                </a:tc>
+                <a:tc>
+                  <a:txBody>
+                    <a:bodyPr/>
+                    <a:lstStyle/>
+                    <a:p>
+                      <a:pPr>
+                        <a:defRPr sz="1000" b="0">
+                          <a:solidFill>
+                            <a:srgbClr val="1C1C1C"/>
+                          </a:solidFill>
+                          <a:latin typeface="Calibri"/>
+                        </a:defRPr>
+                      </a:pPr>
+                      <a:r>
+                        <a:t>0.13</a:t>
+                      </a:r>
+                    </a:p>
+                  </a:txBody>
+                  <a:tcPr>
+                    <a:solidFill>
+                      <a:srgbClr val="FFFFFF"/>
+                    </a:solidFill>
+                  </a:tcPr>
+                </a:tc>
+                <a:tc>
+                  <a:txBody>
+                    <a:bodyPr/>
+                    <a:lstStyle/>
+                    <a:p>
+                      <a:pPr>
+                        <a:defRPr sz="1000" b="0">
+                          <a:solidFill>
+                            <a:srgbClr val="1C1C1C"/>
+                          </a:solidFill>
+                          <a:latin typeface="Calibri"/>
+                        </a:defRPr>
+                      </a:pPr>
+                      <a:r>
+                        <a:t>0.162</a:t>
+                      </a:r>
+                    </a:p>
+                  </a:txBody>
+                  <a:tcPr>
+                    <a:solidFill>
+                      <a:srgbClr val="FFFFFF"/>
+                    </a:solidFill>
+                  </a:tcPr>
+                </a:tc>
+              </a:tr>
+            </a:tbl>
+          </a:graphicData>
+        </a:graphic>
+      </p:graphicFrame>
+      <p:sp>
+        <p:nvSpPr>
+          <p:cNvPr id="9" name="TextBox 8"/>
+          <p:cNvSpPr txBox="1"/>
+          <p:nvPr/>
+        </p:nvSpPr>
+        <p:spPr>
+          <a:xfrm>
+            <a:off x="411480" y="3657600"/>
+            <a:ext cx="11155680" cy="2560320"/>
+          </a:xfrm>
+          <a:prstGeom prst="rect">
+            <a:avLst/>
+          </a:prstGeom>
+          <a:noFill/>
+        </p:spPr>
+        <p:txBody>
+          <a:bodyPr wrap="square">
+            <a:spAutoFit/>
+          </a:bodyPr>
+          <a:lstStyle/>
+          <a:p>
+            <a:pPr>
+              <a:spcAft>
+                <a:spcPts val="400"/>
+              </a:spcAft>
+            </a:pPr>
+            <a:r>
+              <a:rPr sz="1300">
+                <a:solidFill>
+                  <a:srgbClr val="1C1C1C"/>
+                </a:solidFill>
+                <a:latin typeface="Calibri"/>
+              </a:rPr>
+              <a:t>StatsBomb (directional): higher prior progressive passes (PPC) &amp; dispossessed (inv) ↔ more Y1 minutes; high prior pressures/dribbles ↔ fewer minutes in this sample.</a:t>
+            </a:r>
+          </a:p>
+          <a:p>
+            <a:pPr>
+              <a:spcAft>
+                <a:spcPts val="400"/>
+              </a:spcAft>
+            </a:pPr>
+            <a:r>
+              <a:rPr sz="1300">
+                <a:solidFill>
+                  <a:srgbClr val="1C1C1C"/>
+                </a:solidFill>
+                <a:latin typeface="Calibri"/>
+              </a:rPr>
+              <a:t>FBref (stronger N): prior final-third passing, defensive box actions, blocks, aerials ↔ more Y1 minutes (ρ≈0.17–0.25, p&lt;0.05 for top traits).</a:t>
+            </a:r>
+          </a:p>
+          <a:p>
+            <a:pPr>
+              <a:spcAft>
+                <a:spcPts val="400"/>
+              </a:spcAft>
+            </a:pPr>
+            <a:r>
+              <a:rPr sz="1300">
+                <a:solidFill>
+                  <a:srgbClr val="1C1C1C"/>
+                </a:solidFill>
+                <a:latin typeface="Calibri"/>
+              </a:rPr>
+              <a:t>Takeaway for scouts: weight defensive involvement + progression in the penalty/third when judging Big-5 → BL transfers.</a:t>
+            </a:r>
+          </a:p>
+        </p:txBody>
+      </p:sp>
+    </p:spTree>
+  </p:cSld>
+  <p:clrMapOvr>
+    <a:masterClrMapping/>
+  </p:clrMapOvr>
+</p:sld>
+</file>
+
+<file path=ppt/slides/slide16.xml><?xml version="1.0" encoding="utf-8"?>
+<p:sld xmlns:a="http://schemas.openxmlformats.org/drawingml/2006/main" xmlns:p="http://schemas.openxmlformats.org/presentationml/2006/main" xmlns:r="http://schemas.openxmlformats.org/officeDocument/2006/relationships">
+  <p:cSld>
+    <p:spTree>
+      <p:nvGrpSpPr>
+        <p:cNvPr id="1" name=""/>
+        <p:cNvGrpSpPr/>
+        <p:nvPr/>
+      </p:nvGrpSpPr>
+      <p:grpSpPr/>
+      <p:sp>
+        <p:nvSpPr>
+          <p:cNvPr id="2" name="Rectangle 1"/>
+          <p:cNvSpPr/>
+          <p:nvPr/>
+        </p:nvSpPr>
+        <p:spPr>
+          <a:xfrm>
+            <a:off x="0" y="0"/>
+            <a:ext cx="12191695" cy="6858000"/>
+          </a:xfrm>
+          <a:prstGeom prst="rect">
+            <a:avLst/>
+          </a:prstGeom>
+          <a:solidFill>
+            <a:srgbClr val="F4F5F7"/>
+          </a:solidFill>
+          <a:ln>
+            <a:noFill/>
+          </a:ln>
+        </p:spPr>
+        <p:style>
+          <a:lnRef idx="1">
+            <a:schemeClr val="accent1"/>
+          </a:lnRef>
+          <a:fillRef idx="3">
+            <a:schemeClr val="accent1"/>
+          </a:fillRef>
+          <a:effectRef idx="2">
+            <a:schemeClr val="accent1"/>
+          </a:effectRef>
+          <a:fontRef idx="minor">
+            <a:schemeClr val="lt1"/>
+          </a:fontRef>
+        </p:style>
+        <p:txBody>
+          <a:bodyPr rtlCol="0" anchor="ctr"/>
+          <a:lstStyle/>
+          <a:p>
+            <a:pPr algn="ctr"/>
+          </a:p>
+        </p:txBody>
+      </p:sp>
+      <p:sp>
+        <p:nvSpPr>
+          <p:cNvPr id="3" name="TextBox 2"/>
+          <p:cNvSpPr txBox="1"/>
+          <p:nvPr/>
+        </p:nvSpPr>
+        <p:spPr>
+          <a:xfrm>
             <a:off x="411480" y="182880"/>
             <a:ext cx="10972800" cy="256032"/>
           </a:xfrm>
@@ -8818,7 +9546,7 @@
 </p:sld>
 </file>
 
-<file path=ppt/slides/slide15.xml><?xml version="1.0" encoding="utf-8"?>
+<file path=ppt/slides/slide17.xml><?xml version="1.0" encoding="utf-8"?>
 <p:sld xmlns:a="http://schemas.openxmlformats.org/drawingml/2006/main" xmlns:p="http://schemas.openxmlformats.org/presentationml/2006/main" xmlns:r="http://schemas.openxmlformats.org/officeDocument/2006/relationships">
   <p:cSld>
     <p:spTree>
@@ -9194,7 +9922,7 @@
 </p:sld>
 </file>
 
-<file path=ppt/slides/slide16.xml><?xml version="1.0" encoding="utf-8"?>
+<file path=ppt/slides/slide18.xml><?xml version="1.0" encoding="utf-8"?>
 <p:sld xmlns:a="http://schemas.openxmlformats.org/drawingml/2006/main" xmlns:p="http://schemas.openxmlformats.org/presentationml/2006/main" xmlns:r="http://schemas.openxmlformats.org/officeDocument/2006/relationships">
   <p:cSld>
     <p:spTree>
@@ -10131,7 +10859,7 @@
 </p:sld>
 </file>
 
-<file path=ppt/slides/slide17.xml><?xml version="1.0" encoding="utf-8"?>
+<file path=ppt/slides/slide19.xml><?xml version="1.0" encoding="utf-8"?>
 <p:sld xmlns:a="http://schemas.openxmlformats.org/drawingml/2006/main" xmlns:p="http://schemas.openxmlformats.org/presentationml/2006/main" xmlns:r="http://schemas.openxmlformats.org/officeDocument/2006/relationships">
   <p:cSld>
     <p:spTree>
@@ -10193,7 +10921,7 @@
         <p:spPr>
           <a:xfrm>
             <a:off x="548640" y="411480"/>
-            <a:ext cx="10972800" cy="548640"/>
+            <a:ext cx="10972800" cy="5943600"/>
           </a:xfrm>
           <a:prstGeom prst="rect">
             <a:avLst/>
@@ -10206,295 +10934,195 @@
           </a:bodyPr>
           <a:lstStyle/>
           <a:p>
-            <a:pPr algn="l"/>
-            <a:r>
-              <a:rPr sz="2800" b="1">
-                <a:solidFill>
-                  <a:srgbClr val="3D5A80"/>
-                </a:solidFill>
-                <a:latin typeface="Georgia"/>
-              </a:rPr>
-              <a:t>NEXT PHASE  ·  FEEDER REGRESSION (WHY)</a:t>
-            </a:r>
-          </a:p>
-        </p:txBody>
-      </p:sp>
-      <p:sp>
-        <p:nvSpPr>
-          <p:cNvPr id="4" name="TextBox 3"/>
-          <p:cNvSpPr txBox="1"/>
-          <p:nvPr/>
-        </p:nvSpPr>
-        <p:spPr>
-          <a:xfrm>
-            <a:off x="548640" y="960120"/>
-            <a:ext cx="10972800" cy="411480"/>
-          </a:xfrm>
-          <a:prstGeom prst="rect">
-            <a:avLst/>
-          </a:prstGeom>
-          <a:noFill/>
-        </p:spPr>
-        <p:txBody>
-          <a:bodyPr wrap="square">
-            <a:spAutoFit/>
-          </a:bodyPr>
-          <a:lstStyle/>
-          <a:p>
-            <a:pPr algn="l"/>
-            <a:r>
-              <a:rPr sz="1500" b="0">
-                <a:solidFill>
-                  <a:srgbClr val="555555"/>
-                </a:solidFill>
-                <a:latin typeface="Georgia"/>
-              </a:rPr>
-              <a:t>Descriptive “best feeder” is not enough — OLS explains league gaps vs a baseline.</a:t>
-            </a:r>
-          </a:p>
-        </p:txBody>
-      </p:sp>
-      <p:sp>
-        <p:nvSpPr>
-          <p:cNvPr id="5" name="TextBox 4"/>
-          <p:cNvSpPr txBox="1"/>
-          <p:nvPr/>
-        </p:nvSpPr>
-        <p:spPr>
-          <a:xfrm>
-            <a:off x="685800" y="1417320"/>
-            <a:ext cx="5303520" cy="4114800"/>
-          </a:xfrm>
-          <a:prstGeom prst="rect">
-            <a:avLst/>
-          </a:prstGeom>
-          <a:noFill/>
-        </p:spPr>
-        <p:txBody>
-          <a:bodyPr wrap="square">
-            <a:spAutoFit/>
-          </a:bodyPr>
-          <a:lstStyle/>
-          <a:p>
             <a:pPr>
               <a:spcAft>
-                <a:spcPts val="600"/>
+                <a:spcPts val="800"/>
               </a:spcAft>
             </a:pPr>
             <a:r>
-              <a:rPr sz="1400">
-                <a:solidFill>
-                  <a:srgbClr val="1C1C1C"/>
-                </a:solidFill>
-                <a:latin typeface="Arial"/>
-              </a:rPr>
-              <a:t>Outcome: BL Year-1 minutes (playing-time success proxy)</a:t>
+              <a:rPr sz="2800" b="1">
+                <a:solidFill>
+                  <a:srgbClr val="3D5A80"/>
+                </a:solidFill>
+                <a:latin typeface="Georgia"/>
+              </a:rPr>
+              <a:t>WHAT TO TAKE AWAY</a:t>
             </a:r>
           </a:p>
           <a:p>
             <a:pPr>
               <a:spcAft>
-                <a:spcPts val="600"/>
+                <a:spcPts val="800"/>
               </a:spcAft>
             </a:pPr>
             <a:r>
-              <a:rPr sz="1400">
+              <a:rPr sz="1400" b="0">
                 <a:solidFill>
                   <a:srgbClr val="1C1C1C"/>
                 </a:solidFill>
                 <a:latin typeface="Arial"/>
               </a:rPr>
-              <a:t>Reference league: Serie A (lowest mean Y1 minutes descriptively)</a:t>
+              <a:t>Traits that travel · how to use them</a:t>
             </a:r>
           </a:p>
           <a:p>
             <a:pPr>
               <a:spcAft>
-                <a:spcPts val="600"/>
+                <a:spcPts val="800"/>
               </a:spcAft>
             </a:pPr>
             <a:r>
-              <a:rPr sz="1400">
+              <a:rPr sz="1400" b="0">
                 <a:solidFill>
                   <a:srgbClr val="1C1C1C"/>
                 </a:solidFill>
                 <a:latin typeface="Arial"/>
               </a:rPr>
-              <a:t>M1: y1_minutes ~ feeder league dummies + prior minutes + position</a:t>
+              <a:t>FBref (scale)</a:t>
             </a:r>
           </a:p>
           <a:p>
             <a:pPr>
               <a:spcAft>
-                <a:spcPts val="600"/>
+                <a:spcPts val="800"/>
               </a:spcAft>
             </a:pPr>
             <a:r>
-              <a:rPr sz="1400">
+              <a:rPr sz="1400" b="0">
                 <a:solidFill>
                   <a:srgbClr val="1C1C1C"/>
                 </a:solidFill>
                 <a:latin typeface="Arial"/>
               </a:rPr>
-              <a:t>M3: add prior trait percentiles (Final Third, box touches, aerials…)</a:t>
+              <a:t>Strong travelers: Def Pen touches, PrgC / PrgDist, xG, aerial wins, clearances, take-on success.</a:t>
             </a:r>
           </a:p>
           <a:p>
             <a:pPr>
               <a:spcAft>
-                <a:spcPts val="600"/>
+                <a:spcPts val="800"/>
               </a:spcAft>
             </a:pPr>
             <a:r>
-              <a:rPr sz="1400">
+              <a:rPr sz="1400" b="0">
                 <a:solidFill>
                   <a:srgbClr val="1C1C1C"/>
                 </a:solidFill>
                 <a:latin typeface="Arial"/>
               </a:rPr>
-              <a:t>M4: 80/20 holdout check — exploratory, not a production forecast</a:t>
-            </a:r>
-          </a:p>
-        </p:txBody>
-      </p:sp>
-      <p:sp>
-        <p:nvSpPr>
-          <p:cNvPr id="6" name="Rounded Rectangle 5"/>
-          <p:cNvSpPr/>
-          <p:nvPr/>
-        </p:nvSpPr>
-        <p:spPr>
-          <a:xfrm>
-            <a:off x="6309360" y="1417320"/>
-            <a:ext cx="5303520" cy="4389120"/>
-          </a:xfrm>
-          <a:prstGeom prst="roundRect">
-            <a:avLst/>
-          </a:prstGeom>
-          <a:solidFill>
-            <a:srgbClr val="EEF3F8"/>
-          </a:solidFill>
-          <a:ln>
-            <a:solidFill>
-              <a:srgbClr val="D0D4DB"/>
-            </a:solidFill>
-          </a:ln>
-        </p:spPr>
-        <p:style>
-          <a:lnRef idx="1">
-            <a:schemeClr val="accent1"/>
-          </a:lnRef>
-          <a:fillRef idx="3">
-            <a:schemeClr val="accent1"/>
-          </a:fillRef>
-          <a:effectRef idx="2">
-            <a:schemeClr val="accent1"/>
-          </a:effectRef>
-          <a:fontRef idx="minor">
-            <a:schemeClr val="lt1"/>
-          </a:fontRef>
-        </p:style>
-        <p:txBody>
-          <a:bodyPr rtlCol="0" anchor="ctr" wrap="square"/>
-          <a:lstStyle/>
-          <a:p>
-            <a:pPr algn="ctr"/>
-            <a:r>
-              <a:rPr b="1" sz="1600">
-                <a:solidFill>
-                  <a:srgbClr val="3D5A80"/>
-                </a:solidFill>
-                <a:latin typeface="Georgia"/>
-              </a:rPr>
-              <a:t>What this is / is not</a:t>
-            </a:r>
-          </a:p>
-          <a:p>
-            <a:r>
-              <a:rPr sz="1300">
+              <a:t>Shortlist spans attack · pass · carry · defend · aerial.</a:t>
+            </a:r>
+          </a:p>
+          <a:p>
+            <a:pPr>
+              <a:spcAft>
+                <a:spcPts val="800"/>
+              </a:spcAft>
+            </a:pPr>
+            <a:r>
+              <a:rPr sz="1400" b="0">
                 <a:solidFill>
                   <a:srgbClr val="1C1C1C"/>
                 </a:solidFill>
                 <a:latin typeface="Arial"/>
               </a:rPr>
-              <a:t/>
-            </a:r>
-          </a:p>
-          <a:p>
-            <a:r>
-              <a:rPr sz="1300">
+              <a:t>StatsBomb (depth)</a:t>
+            </a:r>
+          </a:p>
+          <a:p>
+            <a:pPr>
+              <a:spcAft>
+                <a:spcPts val="800"/>
+              </a:spcAft>
+            </a:pPr>
+            <a:r>
+              <a:rPr sz="1400" b="0">
                 <a:solidFill>
                   <a:srgbClr val="1C1C1C"/>
                 </a:solidFill>
                 <a:latin typeface="Arial"/>
               </a:rPr>
-              <a:t>IS: next-phase explanatory regression — why Ligue 1 ranks high in means</a:t>
-            </a:r>
-          </a:p>
-          <a:p>
-            <a:r>
-              <a:rPr sz="1300">
+              <a:t>Strong travelers: dispossessed (inv), progressive passes, pressures.</a:t>
+            </a:r>
+          </a:p>
+          <a:p>
+            <a:pPr>
+              <a:spcAft>
+                <a:spcPts val="800"/>
+              </a:spcAft>
+            </a:pPr>
+            <a:r>
+              <a:rPr sz="1400" b="0">
                 <a:solidFill>
                   <a:srgbClr val="1C1C1C"/>
                 </a:solidFill>
                 <a:latin typeface="Arial"/>
               </a:rPr>
-              <a:t/>
-            </a:r>
-          </a:p>
-          <a:p>
-            <a:r>
-              <a:rPr sz="1300">
+              <a:t>11 stability passers on N=60 — live in the combined explorer with FBref.</a:t>
+            </a:r>
+          </a:p>
+          <a:p>
+            <a:pPr>
+              <a:spcAft>
+                <a:spcPts val="800"/>
+              </a:spcAft>
+            </a:pPr>
+            <a:r>
+              <a:rPr sz="1400" b="0">
                 <a:solidFill>
                   <a:srgbClr val="1C1C1C"/>
                 </a:solidFill>
                 <a:latin typeface="Arial"/>
               </a:rPr>
-              <a:t>IS: bridge to holdout ML (same features, train/test split)</a:t>
-            </a:r>
-          </a:p>
-          <a:p>
-            <a:r>
-              <a:rPr sz="1300">
+              <a:t>Scout use</a:t>
+            </a:r>
+          </a:p>
+          <a:p>
+            <a:pPr>
+              <a:spcAft>
+                <a:spcPts val="800"/>
+              </a:spcAft>
+            </a:pPr>
+            <a:r>
+              <a:rPr sz="1400" b="0">
                 <a:solidFill>
                   <a:srgbClr val="1C1C1C"/>
                 </a:solidFill>
                 <a:latin typeface="Arial"/>
               </a:rPr>
-              <a:t/>
-            </a:r>
-          </a:p>
-          <a:p>
-            <a:r>
-              <a:rPr sz="1300">
+              <a:t>When evaluating a Big 5 → Bundesliga target, weight shortlisted traits higher than flashy unstable ones.</a:t>
+            </a:r>
+          </a:p>
+          <a:p>
+            <a:pPr>
+              <a:spcAft>
+                <a:spcPts val="800"/>
+              </a:spcAft>
+            </a:pPr>
+            <a:r>
+              <a:rPr sz="1400" b="0">
                 <a:solidFill>
                   <a:srgbClr val="1C1C1C"/>
                 </a:solidFill>
                 <a:latin typeface="Arial"/>
               </a:rPr>
-              <a:t>NOT: validated BL performance prediction</a:t>
-            </a:r>
-          </a:p>
-          <a:p>
-            <a:r>
-              <a:rPr sz="1300">
+              <a:t>Do not treat two metrics in a redundant pair as independent evidence — unless you intentionally kept both (e.g. aerial wins + losses).</a:t>
+            </a:r>
+          </a:p>
+          <a:p>
+            <a:pPr>
+              <a:spcAft>
+                <a:spcPts val="800"/>
+              </a:spcAft>
+            </a:pPr>
+            <a:r>
+              <a:rPr sz="1400" b="0">
                 <a:solidFill>
                   <a:srgbClr val="1C1C1C"/>
                 </a:solidFill>
                 <a:latin typeface="Arial"/>
               </a:rPr>
-              <a:t/>
-            </a:r>
-          </a:p>
-          <a:p>
-            <a:r>
-              <a:rPr sz="1300">
-                <a:solidFill>
-                  <a:srgbClr val="1C1C1C"/>
-                </a:solidFill>
-                <a:latin typeface="Arial"/>
-              </a:rPr>
-              <a:t>N = 117 · league cells are small → wide confidence bands</a:t>
+              <a:t>Explorer: one HTML tool combining FBref + StatsBomb (toggle source). Gates: FBref r≥0.50 · StatsBomb r≥0.41.</a:t>
             </a:r>
           </a:p>
         </p:txBody>
@@ -10507,7 +11135,7 @@
 </p:sld>
 </file>
 
-<file path=ppt/slides/slide18.xml><?xml version="1.0" encoding="utf-8"?>
+<file path=ppt/slides/slide19.xml><?xml version="1.0" encoding="utf-8"?>
 <p:sld xmlns:a="http://schemas.openxmlformats.org/drawingml/2006/main" xmlns:p="http://schemas.openxmlformats.org/presentationml/2006/main" xmlns:r="http://schemas.openxmlformats.org/officeDocument/2006/relationships">
   <p:cSld>
     <p:spTree>
@@ -10569,7 +11197,7 @@
         <p:spPr>
           <a:xfrm>
             <a:off x="548640" y="411480"/>
-            <a:ext cx="10972800" cy="548640"/>
+            <a:ext cx="10972800" cy="5943600"/>
           </a:xfrm>
           <a:prstGeom prst="rect">
             <a:avLst/>
@@ -10582,1503 +11210,161 @@
           </a:bodyPr>
           <a:lstStyle/>
           <a:p>
-            <a:pPr algn="l"/>
-            <a:r>
-              <a:rPr sz="2600" b="1">
-                <a:solidFill>
-                  <a:srgbClr val="3D5A80"/>
-                </a:solidFill>
-                <a:latin typeface="Georgia"/>
-              </a:rPr>
-              <a:t>RESULTS  ·  REGRESSION — WHY LIGUE 1 LOOKS BEST</a:t>
-            </a:r>
-          </a:p>
-        </p:txBody>
-      </p:sp>
-      <p:sp>
-        <p:nvSpPr>
-          <p:cNvPr id="4" name="TextBox 3"/>
-          <p:cNvSpPr txBox="1"/>
-          <p:nvPr/>
-        </p:nvSpPr>
-        <p:spPr>
-          <a:xfrm>
-            <a:off x="548640" y="914400"/>
-            <a:ext cx="10972800" cy="365760"/>
-          </a:xfrm>
-          <a:prstGeom prst="rect">
-            <a:avLst/>
-          </a:prstGeom>
-          <a:noFill/>
-        </p:spPr>
-        <p:txBody>
-          <a:bodyPr wrap="square">
-            <a:spAutoFit/>
-          </a:bodyPr>
-          <a:lstStyle/>
-          <a:p>
-            <a:pPr algn="l"/>
-            <a:r>
-              <a:rPr sz="1300" b="0">
-                <a:solidFill>
-                  <a:srgbClr val="555555"/>
-                </a:solidFill>
-                <a:latin typeface="Georgia"/>
-              </a:rPr>
-              <a:t>M1 R²=0.086  →  M3 R²=0.215 when traits added  ·  holdout r=0.35 (exploratory)</a:t>
-            </a:r>
-          </a:p>
-        </p:txBody>
-      </p:sp>
-      <p:graphicFrame>
-        <p:nvGraphicFramePr>
-          <p:cNvPr id="5" name="Table 4"/>
-          <p:cNvGraphicFramePr>
-            <a:graphicFrameLocks noGrp="1"/>
-          </p:cNvGraphicFramePr>
-          <p:nvPr/>
-        </p:nvGraphicFramePr>
-        <p:xfrm>
-          <a:off x="548640" y="1325880"/>
-          <a:ext cx="3657600" cy="1170432"/>
-        </p:xfrm>
-        <a:graphic>
-          <a:graphicData uri="http://schemas.openxmlformats.org/drawingml/2006/table">
-            <a:tbl>
-              <a:tblPr firstRow="1" bandRow="1">
-                <a:tableStyleId>{5C22544A-7EE6-4342-B048-85BDC9FD1C3A}</a:tableStyleId>
-              </a:tblPr>
-              <a:tblGrid>
-                <a:gridCol w="1645920"/>
-                <a:gridCol w="1097280"/>
-                <a:gridCol w="914400"/>
-              </a:tblGrid>
-              <a:tr h="292608">
-                <a:tc>
-                  <a:txBody>
-                    <a:bodyPr/>
-                    <a:lstStyle/>
-                    <a:p>
-                      <a:pPr algn="ctr"/>
-                      <a:r>
-                        <a:rPr sz="1100" b="1">
-                          <a:solidFill>
-                            <a:srgbClr val="1C1C1C"/>
-                          </a:solidFill>
-                          <a:latin typeface="Arial"/>
-                        </a:rPr>
-                        <a:t>League vs Serie A</a:t>
-                      </a:r>
-                    </a:p>
-                  </a:txBody>
-                  <a:tcPr>
-                    <a:solidFill>
-                      <a:srgbClr val="EEF3F8"/>
-                    </a:solidFill>
-                  </a:tcPr>
-                </a:tc>
-                <a:tc>
-                  <a:txBody>
-                    <a:bodyPr/>
-                    <a:lstStyle/>
-                    <a:p>
-                      <a:pPr algn="ctr"/>
-                      <a:r>
-                        <a:rPr sz="1100" b="1">
-                          <a:solidFill>
-                            <a:srgbClr val="1C1C1C"/>
-                          </a:solidFill>
-                          <a:latin typeface="Arial"/>
-                        </a:rPr>
-                        <a:t>Δ Y1 min</a:t>
-                      </a:r>
-                    </a:p>
-                  </a:txBody>
-                  <a:tcPr>
-                    <a:solidFill>
-                      <a:srgbClr val="EEF3F8"/>
-                    </a:solidFill>
-                  </a:tcPr>
-                </a:tc>
-                <a:tc>
-                  <a:txBody>
-                    <a:bodyPr/>
-                    <a:lstStyle/>
-                    <a:p>
-                      <a:pPr algn="ctr"/>
-                      <a:r>
-                        <a:rPr sz="1100" b="1">
-                          <a:solidFill>
-                            <a:srgbClr val="1C1C1C"/>
-                          </a:solidFill>
-                          <a:latin typeface="Arial"/>
-                        </a:rPr>
-                        <a:t>p</a:t>
-                      </a:r>
-                    </a:p>
-                  </a:txBody>
-                  <a:tcPr>
-                    <a:solidFill>
-                      <a:srgbClr val="EEF3F8"/>
-                    </a:solidFill>
-                  </a:tcPr>
-                </a:tc>
-              </a:tr>
-              <a:tr h="292608">
-                <a:tc>
-                  <a:txBody>
-                    <a:bodyPr/>
-                    <a:lstStyle/>
-                    <a:p>
-                      <a:pPr algn="ctr"/>
-                      <a:r>
-                        <a:rPr sz="1100" b="0">
-                          <a:solidFill>
-                            <a:srgbClr val="1C1C1C"/>
-                          </a:solidFill>
-                          <a:latin typeface="Arial"/>
-                        </a:rPr>
-                        <a:t>La Liga</a:t>
-                      </a:r>
-                    </a:p>
-                  </a:txBody>
-                  <a:tcPr/>
-                </a:tc>
-                <a:tc>
-                  <a:txBody>
-                    <a:bodyPr/>
-                    <a:lstStyle/>
-                    <a:p>
-                      <a:pPr algn="ctr"/>
-                      <a:r>
-                        <a:rPr sz="1100" b="0">
-                          <a:solidFill>
-                            <a:srgbClr val="1C1C1C"/>
-                          </a:solidFill>
-                          <a:latin typeface="Arial"/>
-                        </a:rPr>
-                        <a:t>+48</a:t>
-                      </a:r>
-                    </a:p>
-                  </a:txBody>
-                  <a:tcPr/>
-                </a:tc>
-                <a:tc>
-                  <a:txBody>
-                    <a:bodyPr/>
-                    <a:lstStyle/>
-                    <a:p>
-                      <a:pPr algn="ctr"/>
-                      <a:r>
-                        <a:rPr sz="1100" b="0">
-                          <a:solidFill>
-                            <a:srgbClr val="1C1C1C"/>
-                          </a:solidFill>
-                          <a:latin typeface="Arial"/>
-                        </a:rPr>
-                        <a:t>0.856</a:t>
-                      </a:r>
-                    </a:p>
-                  </a:txBody>
-                  <a:tcPr/>
-                </a:tc>
-              </a:tr>
-              <a:tr h="292608">
-                <a:tc>
-                  <a:txBody>
-                    <a:bodyPr/>
-                    <a:lstStyle/>
-                    <a:p>
-                      <a:pPr algn="ctr"/>
-                      <a:r>
-                        <a:rPr sz="1100" b="0">
-                          <a:solidFill>
-                            <a:srgbClr val="1C1C1C"/>
-                          </a:solidFill>
-                          <a:latin typeface="Arial"/>
-                        </a:rPr>
-                        <a:t>Ligue 1</a:t>
-                      </a:r>
-                    </a:p>
-                  </a:txBody>
-                  <a:tcPr/>
-                </a:tc>
-                <a:tc>
-                  <a:txBody>
-                    <a:bodyPr/>
-                    <a:lstStyle/>
-                    <a:p>
-                      <a:pPr algn="ctr"/>
-                      <a:r>
-                        <a:rPr sz="1100" b="0">
-                          <a:solidFill>
-                            <a:srgbClr val="1C1C1C"/>
-                          </a:solidFill>
-                          <a:latin typeface="Arial"/>
-                        </a:rPr>
-                        <a:t>+163</a:t>
-                      </a:r>
-                    </a:p>
-                  </a:txBody>
-                  <a:tcPr/>
-                </a:tc>
-                <a:tc>
-                  <a:txBody>
-                    <a:bodyPr/>
-                    <a:lstStyle/>
-                    <a:p>
-                      <a:pPr algn="ctr"/>
-                      <a:r>
-                        <a:rPr sz="1100" b="0">
-                          <a:solidFill>
-                            <a:srgbClr val="1C1C1C"/>
-                          </a:solidFill>
-                          <a:latin typeface="Arial"/>
-                        </a:rPr>
-                        <a:t>0.375</a:t>
-                      </a:r>
-                    </a:p>
-                  </a:txBody>
-                  <a:tcPr/>
-                </a:tc>
-              </a:tr>
-              <a:tr h="292608">
-                <a:tc>
-                  <a:txBody>
-                    <a:bodyPr/>
-                    <a:lstStyle/>
-                    <a:p>
-                      <a:pPr algn="ctr"/>
-                      <a:r>
-                        <a:rPr sz="1100" b="0">
-                          <a:solidFill>
-                            <a:srgbClr val="1C1C1C"/>
-                          </a:solidFill>
-                          <a:latin typeface="Arial"/>
-                        </a:rPr>
-                        <a:t>Premier League</a:t>
-                      </a:r>
-                    </a:p>
-                  </a:txBody>
-                  <a:tcPr/>
-                </a:tc>
-                <a:tc>
-                  <a:txBody>
-                    <a:bodyPr/>
-                    <a:lstStyle/>
-                    <a:p>
-                      <a:pPr algn="ctr"/>
-                      <a:r>
-                        <a:rPr sz="1100" b="0">
-                          <a:solidFill>
-                            <a:srgbClr val="1C1C1C"/>
-                          </a:solidFill>
-                          <a:latin typeface="Arial"/>
-                        </a:rPr>
-                        <a:t>+88</a:t>
-                      </a:r>
-                    </a:p>
-                  </a:txBody>
-                  <a:tcPr/>
-                </a:tc>
-                <a:tc>
-                  <a:txBody>
-                    <a:bodyPr/>
-                    <a:lstStyle/>
-                    <a:p>
-                      <a:pPr algn="ctr"/>
-                      <a:r>
-                        <a:rPr sz="1100" b="0">
-                          <a:solidFill>
-                            <a:srgbClr val="1C1C1C"/>
-                          </a:solidFill>
-                          <a:latin typeface="Arial"/>
-                        </a:rPr>
-                        <a:t>0.661</a:t>
-                      </a:r>
-                    </a:p>
-                  </a:txBody>
-                  <a:tcPr/>
-                </a:tc>
-              </a:tr>
-            </a:tbl>
-          </a:graphicData>
-        </a:graphic>
-      </p:graphicFrame>
-      <p:graphicFrame>
-        <p:nvGraphicFramePr>
-          <p:cNvPr id="6" name="Table 5"/>
-          <p:cNvGraphicFramePr>
-            <a:graphicFrameLocks noGrp="1"/>
-          </p:cNvGraphicFramePr>
-          <p:nvPr/>
-        </p:nvGraphicFramePr>
-        <p:xfrm>
-          <a:off x="4663440" y="1325880"/>
-          <a:ext cx="3657600" cy="1755648"/>
-        </p:xfrm>
-        <a:graphic>
-          <a:graphicData uri="http://schemas.openxmlformats.org/drawingml/2006/table">
-            <a:tbl>
-              <a:tblPr firstRow="1" bandRow="1">
-                <a:tableStyleId>{5C22544A-7EE6-4342-B048-85BDC9FD1C3A}</a:tableStyleId>
-              </a:tblPr>
-              <a:tblGrid>
-                <a:gridCol w="1737360"/>
-                <a:gridCol w="1005840"/>
-                <a:gridCol w="914400"/>
-              </a:tblGrid>
-              <a:tr h="292608">
-                <a:tc>
-                  <a:txBody>
-                    <a:bodyPr/>
-                    <a:lstStyle/>
-                    <a:p>
-                      <a:pPr algn="ctr"/>
-                      <a:r>
-                        <a:rPr sz="1100" b="1">
-                          <a:solidFill>
-                            <a:srgbClr val="1C1C1C"/>
-                          </a:solidFill>
-                          <a:latin typeface="Arial"/>
-                        </a:rPr>
-                        <a:t>Prior trait pct</a:t>
-                      </a:r>
-                    </a:p>
-                  </a:txBody>
-                  <a:tcPr>
-                    <a:solidFill>
-                      <a:srgbClr val="EEF3F8"/>
-                    </a:solidFill>
-                  </a:tcPr>
-                </a:tc>
-                <a:tc>
-                  <a:txBody>
-                    <a:bodyPr/>
-                    <a:lstStyle/>
-                    <a:p>
-                      <a:pPr algn="ctr"/>
-                      <a:r>
-                        <a:rPr sz="1100" b="1">
-                          <a:solidFill>
-                            <a:srgbClr val="1C1C1C"/>
-                          </a:solidFill>
-                          <a:latin typeface="Arial"/>
-                        </a:rPr>
-                        <a:t>Δ Y1 min</a:t>
-                      </a:r>
-                    </a:p>
-                  </a:txBody>
-                  <a:tcPr>
-                    <a:solidFill>
-                      <a:srgbClr val="EEF3F8"/>
-                    </a:solidFill>
-                  </a:tcPr>
-                </a:tc>
-                <a:tc>
-                  <a:txBody>
-                    <a:bodyPr/>
-                    <a:lstStyle/>
-                    <a:p>
-                      <a:pPr algn="ctr"/>
-                      <a:r>
-                        <a:rPr sz="1100" b="1">
-                          <a:solidFill>
-                            <a:srgbClr val="1C1C1C"/>
-                          </a:solidFill>
-                          <a:latin typeface="Arial"/>
-                        </a:rPr>
-                        <a:t>p</a:t>
-                      </a:r>
-                    </a:p>
-                  </a:txBody>
-                  <a:tcPr>
-                    <a:solidFill>
-                      <a:srgbClr val="EEF3F8"/>
-                    </a:solidFill>
-                  </a:tcPr>
-                </a:tc>
-              </a:tr>
-              <a:tr h="292608">
-                <a:tc>
-                  <a:txBody>
-                    <a:bodyPr/>
-                    <a:lstStyle/>
-                    <a:p>
-                      <a:pPr algn="ctr"/>
-                      <a:r>
-                        <a:rPr sz="1100" b="0">
-                          <a:solidFill>
-                            <a:srgbClr val="1C1C1C"/>
-                          </a:solidFill>
-                          <a:latin typeface="Arial"/>
-                        </a:rPr>
-                        <a:t>Lost Aerial*</a:t>
-                      </a:r>
-                    </a:p>
-                  </a:txBody>
-                  <a:tcPr/>
-                </a:tc>
-                <a:tc>
-                  <a:txBody>
-                    <a:bodyPr/>
-                    <a:lstStyle/>
-                    <a:p>
-                      <a:pPr algn="ctr"/>
-                      <a:r>
-                        <a:rPr sz="1100" b="0">
-                          <a:solidFill>
-                            <a:srgbClr val="1C1C1C"/>
-                          </a:solidFill>
-                          <a:latin typeface="Arial"/>
-                        </a:rPr>
-                        <a:t>+9</a:t>
-                      </a:r>
-                    </a:p>
-                  </a:txBody>
-                  <a:tcPr/>
-                </a:tc>
-                <a:tc>
-                  <a:txBody>
-                    <a:bodyPr/>
-                    <a:lstStyle/>
-                    <a:p>
-                      <a:pPr algn="ctr"/>
-                      <a:r>
-                        <a:rPr sz="1100" b="0">
-                          <a:solidFill>
-                            <a:srgbClr val="1C1C1C"/>
-                          </a:solidFill>
-                          <a:latin typeface="Arial"/>
-                        </a:rPr>
-                        <a:t>0.002</a:t>
-                      </a:r>
-                    </a:p>
-                  </a:txBody>
-                  <a:tcPr/>
-                </a:tc>
-              </a:tr>
-              <a:tr h="292608">
-                <a:tc>
-                  <a:txBody>
-                    <a:bodyPr/>
-                    <a:lstStyle/>
-                    <a:p>
-                      <a:pPr algn="ctr"/>
-                      <a:r>
-                        <a:rPr sz="1100" b="0">
-                          <a:solidFill>
-                            <a:srgbClr val="1C1C1C"/>
-                          </a:solidFill>
-                          <a:latin typeface="Arial"/>
-                        </a:rPr>
-                        <a:t>Final Third</a:t>
-                      </a:r>
-                    </a:p>
-                  </a:txBody>
-                  <a:tcPr/>
-                </a:tc>
-                <a:tc>
-                  <a:txBody>
-                    <a:bodyPr/>
-                    <a:lstStyle/>
-                    <a:p>
-                      <a:pPr algn="ctr"/>
-                      <a:r>
-                        <a:rPr sz="1100" b="0">
-                          <a:solidFill>
-                            <a:srgbClr val="1C1C1C"/>
-                          </a:solidFill>
-                          <a:latin typeface="Arial"/>
-                        </a:rPr>
-                        <a:t>+5</a:t>
-                      </a:r>
-                    </a:p>
-                  </a:txBody>
-                  <a:tcPr/>
-                </a:tc>
-                <a:tc>
-                  <a:txBody>
-                    <a:bodyPr/>
-                    <a:lstStyle/>
-                    <a:p>
-                      <a:pPr algn="ctr"/>
-                      <a:r>
-                        <a:rPr sz="1100" b="0">
-                          <a:solidFill>
-                            <a:srgbClr val="1C1C1C"/>
-                          </a:solidFill>
-                          <a:latin typeface="Arial"/>
-                        </a:rPr>
-                        <a:t>0.158</a:t>
-                      </a:r>
-                    </a:p>
-                  </a:txBody>
-                  <a:tcPr/>
-                </a:tc>
-              </a:tr>
-              <a:tr h="292608">
-                <a:tc>
-                  <a:txBody>
-                    <a:bodyPr/>
-                    <a:lstStyle/>
-                    <a:p>
-                      <a:pPr algn="ctr"/>
-                      <a:r>
-                        <a:rPr sz="1100" b="0">
-                          <a:solidFill>
-                            <a:srgbClr val="1C1C1C"/>
-                          </a:solidFill>
-                          <a:latin typeface="Arial"/>
-                        </a:rPr>
-                        <a:t>Def Pen Touches</a:t>
-                      </a:r>
-                    </a:p>
-                  </a:txBody>
-                  <a:tcPr/>
-                </a:tc>
-                <a:tc>
-                  <a:txBody>
-                    <a:bodyPr/>
-                    <a:lstStyle/>
-                    <a:p>
-                      <a:pPr algn="ctr"/>
-                      <a:r>
-                        <a:rPr sz="1100" b="0">
-                          <a:solidFill>
-                            <a:srgbClr val="1C1C1C"/>
-                          </a:solidFill>
-                          <a:latin typeface="Arial"/>
-                        </a:rPr>
-                        <a:t>+5</a:t>
-                      </a:r>
-                    </a:p>
-                  </a:txBody>
-                  <a:tcPr/>
-                </a:tc>
-                <a:tc>
-                  <a:txBody>
-                    <a:bodyPr/>
-                    <a:lstStyle/>
-                    <a:p>
-                      <a:pPr algn="ctr"/>
-                      <a:r>
-                        <a:rPr sz="1100" b="0">
-                          <a:solidFill>
-                            <a:srgbClr val="1C1C1C"/>
-                          </a:solidFill>
-                          <a:latin typeface="Arial"/>
-                        </a:rPr>
-                        <a:t>0.189</a:t>
-                      </a:r>
-                    </a:p>
-                  </a:txBody>
-                  <a:tcPr/>
-                </a:tc>
-              </a:tr>
-              <a:tr h="292608">
-                <a:tc>
-                  <a:txBody>
-                    <a:bodyPr/>
-                    <a:lstStyle/>
-                    <a:p>
-                      <a:pPr algn="ctr"/>
-                      <a:r>
-                        <a:rPr sz="1100" b="0">
-                          <a:solidFill>
-                            <a:srgbClr val="1C1C1C"/>
-                          </a:solidFill>
-                          <a:latin typeface="Arial"/>
-                        </a:rPr>
-                        <a:t>PrgDist Total</a:t>
-                      </a:r>
-                    </a:p>
-                  </a:txBody>
-                  <a:tcPr/>
-                </a:tc>
-                <a:tc>
-                  <a:txBody>
-                    <a:bodyPr/>
-                    <a:lstStyle/>
-                    <a:p>
-                      <a:pPr algn="ctr"/>
-                      <a:r>
-                        <a:rPr sz="1100" b="0">
-                          <a:solidFill>
-                            <a:srgbClr val="1C1C1C"/>
-                          </a:solidFill>
-                          <a:latin typeface="Arial"/>
-                        </a:rPr>
-                        <a:t>-4</a:t>
-                      </a:r>
-                    </a:p>
-                  </a:txBody>
-                  <a:tcPr/>
-                </a:tc>
-                <a:tc>
-                  <a:txBody>
-                    <a:bodyPr/>
-                    <a:lstStyle/>
-                    <a:p>
-                      <a:pPr algn="ctr"/>
-                      <a:r>
-                        <a:rPr sz="1100" b="0">
-                          <a:solidFill>
-                            <a:srgbClr val="1C1C1C"/>
-                          </a:solidFill>
-                          <a:latin typeface="Arial"/>
-                        </a:rPr>
-                        <a:t>0.249</a:t>
-                      </a:r>
-                    </a:p>
-                  </a:txBody>
-                  <a:tcPr/>
-                </a:tc>
-              </a:tr>
-              <a:tr h="292608">
-                <a:tc>
-                  <a:txBody>
-                    <a:bodyPr/>
-                    <a:lstStyle/>
-                    <a:p>
-                      <a:pPr algn="ctr"/>
-                      <a:r>
-                        <a:rPr sz="1100" b="0">
-                          <a:solidFill>
-                            <a:srgbClr val="1C1C1C"/>
-                          </a:solidFill>
-                          <a:latin typeface="Arial"/>
-                        </a:rPr>
-                        <a:t>xG Per</a:t>
-                      </a:r>
-                    </a:p>
-                  </a:txBody>
-                  <a:tcPr/>
-                </a:tc>
-                <a:tc>
-                  <a:txBody>
-                    <a:bodyPr/>
-                    <a:lstStyle/>
-                    <a:p>
-                      <a:pPr algn="ctr"/>
-                      <a:r>
-                        <a:rPr sz="1100" b="0">
-                          <a:solidFill>
-                            <a:srgbClr val="1C1C1C"/>
-                          </a:solidFill>
-                          <a:latin typeface="Arial"/>
-                        </a:rPr>
-                        <a:t>+2</a:t>
-                      </a:r>
-                    </a:p>
-                  </a:txBody>
-                  <a:tcPr/>
-                </a:tc>
-                <a:tc>
-                  <a:txBody>
-                    <a:bodyPr/>
-                    <a:lstStyle/>
-                    <a:p>
-                      <a:pPr algn="ctr"/>
-                      <a:r>
-                        <a:rPr sz="1100" b="0">
-                          <a:solidFill>
-                            <a:srgbClr val="1C1C1C"/>
-                          </a:solidFill>
-                          <a:latin typeface="Arial"/>
-                        </a:rPr>
-                        <a:t>0.430</a:t>
-                      </a:r>
-                    </a:p>
-                  </a:txBody>
-                  <a:tcPr/>
-                </a:tc>
-              </a:tr>
-            </a:tbl>
-          </a:graphicData>
-        </a:graphic>
-      </p:graphicFrame>
-      <p:sp>
-        <p:nvSpPr>
-          <p:cNvPr id="7" name="TextBox 6"/>
-          <p:cNvSpPr txBox="1"/>
-          <p:nvPr/>
-        </p:nvSpPr>
-        <p:spPr>
-          <a:xfrm>
-            <a:off x="8595360" y="1325880"/>
-            <a:ext cx="3108960" cy="4114800"/>
-          </a:xfrm>
-          <a:prstGeom prst="rect">
-            <a:avLst/>
-          </a:prstGeom>
-          <a:noFill/>
-        </p:spPr>
-        <p:txBody>
-          <a:bodyPr wrap="square">
-            <a:spAutoFit/>
-          </a:bodyPr>
-          <a:lstStyle/>
-          <a:p>
             <a:pPr>
               <a:spcAft>
-                <a:spcPts val="600"/>
+                <a:spcPts val="800"/>
               </a:spcAft>
             </a:pPr>
             <a:r>
-              <a:rPr sz="1200">
-                <a:solidFill>
-                  <a:srgbClr val="1C1C1C"/>
-                </a:solidFill>
-                <a:latin typeface="Arial"/>
-              </a:rPr>
-              <a:t>Descriptive: Ligue 1 highest mean Y1 minutes</a:t>
+              <a:rPr sz="2800" b="1">
+                <a:solidFill>
+                  <a:srgbClr val="3D5A80"/>
+                </a:solidFill>
+                <a:latin typeface="Georgia"/>
+              </a:rPr>
+              <a:t>WHAT TO TAKE AWAY</a:t>
             </a:r>
           </a:p>
           <a:p>
             <a:pPr>
               <a:spcAft>
-                <a:spcPts val="600"/>
+                <a:spcPts val="800"/>
               </a:spcAft>
             </a:pPr>
             <a:r>
-              <a:rPr sz="1200">
+              <a:rPr sz="1400" b="0">
                 <a:solidFill>
                   <a:srgbClr val="1C1C1C"/>
                 </a:solidFill>
                 <a:latin typeface="Arial"/>
               </a:rPr>
-              <a:t>Regression: +163 min vs Serie A, but p≈0.38 — not significant at N=117</a:t>
+              <a:t>Traits that travel · how to use them</a:t>
             </a:r>
           </a:p>
           <a:p>
             <a:pPr>
               <a:spcAft>
-                <a:spcPts val="600"/>
+                <a:spcPts val="800"/>
               </a:spcAft>
             </a:pPr>
             <a:r>
-              <a:rPr sz="1200">
+              <a:rPr sz="1400" b="0">
                 <a:solidFill>
                   <a:srgbClr val="1C1C1C"/>
                 </a:solidFill>
                 <a:latin typeface="Arial"/>
               </a:rPr>
-              <a:t>Trait profile matters more than league label (R² doubles)</a:t>
+              <a:t>FBref (scale)</a:t>
             </a:r>
           </a:p>
           <a:p>
             <a:pPr>
               <a:spcAft>
-                <a:spcPts val="600"/>
+                <a:spcPts val="800"/>
               </a:spcAft>
             </a:pPr>
             <a:r>
-              <a:rPr sz="1200">
+              <a:rPr sz="1400" b="0">
                 <a:solidFill>
                   <a:srgbClr val="1C1C1C"/>
                 </a:solidFill>
                 <a:latin typeface="Arial"/>
               </a:rPr>
-              <a:t>Lost Aerial prior pct: +9 min per step, p=0.002*</a:t>
+              <a:t>Strong travelers: Def Pen touches, PrgC / PrgDist, xG, aerial wins, clearances, take-on success.</a:t>
             </a:r>
           </a:p>
           <a:p>
             <a:pPr>
               <a:spcAft>
-                <a:spcPts val="600"/>
+                <a:spcPts val="800"/>
               </a:spcAft>
             </a:pPr>
             <a:r>
-              <a:rPr sz="1200">
+              <a:rPr sz="1400" b="0">
                 <a:solidFill>
                   <a:srgbClr val="1C1C1C"/>
                 </a:solidFill>
                 <a:latin typeface="Arial"/>
               </a:rPr>
-              <a:t>Takeaway: scout traits + minutes; league is a weak residual signal</a:t>
-            </a:r>
-          </a:p>
-        </p:txBody>
-      </p:sp>
-      <p:sp>
-        <p:nvSpPr>
-          <p:cNvPr id="8" name="TextBox 7"/>
-          <p:cNvSpPr txBox="1"/>
-          <p:nvPr/>
-        </p:nvSpPr>
-        <p:spPr>
-          <a:xfrm>
-            <a:off x="548640" y="5349240"/>
-            <a:ext cx="10972800" cy="457200"/>
-          </a:xfrm>
-          <a:prstGeom prst="rect">
-            <a:avLst/>
-          </a:prstGeom>
-          <a:noFill/>
-        </p:spPr>
-        <p:txBody>
-          <a:bodyPr wrap="square">
-            <a:spAutoFit/>
-          </a:bodyPr>
-          <a:lstStyle/>
-          <a:p>
-            <a:pPr algn="l"/>
-            <a:r>
-              <a:rPr sz="1100" b="0">
-                <a:solidFill>
-                  <a:srgbClr val="555555"/>
-                </a:solidFill>
-                <a:latin typeface="Georgia"/>
-              </a:rPr>
-              <a:t>* p&lt;0.05. Full tables: results/FEEDER_REGRESSION.md</a:t>
-            </a:r>
-          </a:p>
-        </p:txBody>
-      </p:sp>
-    </p:spTree>
-  </p:cSld>
-  <p:clrMapOvr>
-    <a:masterClrMapping/>
-  </p:clrMapOvr>
-</p:sld>
-</file>
-
-<file path=ppt/slides/slide19.xml><?xml version="1.0" encoding="utf-8"?>
-<p:sld xmlns:a="http://schemas.openxmlformats.org/drawingml/2006/main" xmlns:p="http://schemas.openxmlformats.org/presentationml/2006/main" xmlns:r="http://schemas.openxmlformats.org/officeDocument/2006/relationships">
-  <p:cSld>
-    <p:spTree>
-      <p:nvGrpSpPr>
-        <p:cNvPr id="1" name=""/>
-        <p:cNvGrpSpPr/>
-        <p:nvPr/>
-      </p:nvGrpSpPr>
-      <p:grpSpPr/>
-      <p:sp>
-        <p:nvSpPr>
-          <p:cNvPr id="2" name="Rectangle 1"/>
-          <p:cNvSpPr/>
-          <p:nvPr/>
-        </p:nvSpPr>
-        <p:spPr>
-          <a:xfrm>
-            <a:off x="0" y="0"/>
-            <a:ext cx="12191695" cy="6858000"/>
-          </a:xfrm>
-          <a:prstGeom prst="rect">
-            <a:avLst/>
-          </a:prstGeom>
-          <a:solidFill>
-            <a:srgbClr val="F4F5F7"/>
-          </a:solidFill>
-          <a:ln>
-            <a:noFill/>
-          </a:ln>
-        </p:spPr>
-        <p:style>
-          <a:lnRef idx="1">
-            <a:schemeClr val="accent1"/>
-          </a:lnRef>
-          <a:fillRef idx="3">
-            <a:schemeClr val="accent1"/>
-          </a:fillRef>
-          <a:effectRef idx="2">
-            <a:schemeClr val="accent1"/>
-          </a:effectRef>
-          <a:fontRef idx="minor">
-            <a:schemeClr val="lt1"/>
-          </a:fontRef>
-        </p:style>
-        <p:txBody>
-          <a:bodyPr rtlCol="0" anchor="ctr"/>
-          <a:lstStyle/>
-          <a:p>
-            <a:pPr algn="ctr"/>
-          </a:p>
-        </p:txBody>
-      </p:sp>
-      <p:sp>
-        <p:nvSpPr>
-          <p:cNvPr id="3" name="TextBox 2"/>
-          <p:cNvSpPr txBox="1"/>
-          <p:nvPr/>
-        </p:nvSpPr>
-        <p:spPr>
-          <a:xfrm>
-            <a:off x="502920" y="274320"/>
-            <a:ext cx="10972800" cy="274320"/>
-          </a:xfrm>
-          <a:prstGeom prst="rect">
-            <a:avLst/>
-          </a:prstGeom>
-          <a:noFill/>
-        </p:spPr>
-        <p:txBody>
-          <a:bodyPr wrap="square">
-            <a:spAutoFit/>
-          </a:bodyPr>
-          <a:lstStyle/>
-          <a:p>
-            <a:pPr algn="l"/>
-            <a:r>
-              <a:rPr sz="1300" b="1">
-                <a:solidFill>
-                  <a:srgbClr val="3D5A80"/>
-                </a:solidFill>
-                <a:latin typeface="Calibri"/>
-              </a:rPr>
-              <a:t>WHAT TO TAKE AWAY</a:t>
-            </a:r>
-          </a:p>
-        </p:txBody>
-      </p:sp>
-      <p:sp>
-        <p:nvSpPr>
-          <p:cNvPr id="4" name="TextBox 3"/>
-          <p:cNvSpPr txBox="1"/>
-          <p:nvPr/>
-        </p:nvSpPr>
-        <p:spPr>
-          <a:xfrm>
-            <a:off x="502920" y="548640"/>
-            <a:ext cx="10972800" cy="365760"/>
-          </a:xfrm>
-          <a:prstGeom prst="rect">
-            <a:avLst/>
-          </a:prstGeom>
-          <a:noFill/>
-        </p:spPr>
-        <p:txBody>
-          <a:bodyPr wrap="square">
-            <a:spAutoFit/>
-          </a:bodyPr>
-          <a:lstStyle/>
-          <a:p>
-            <a:pPr algn="l"/>
-            <a:r>
-              <a:rPr sz="2400" b="1">
-                <a:solidFill>
-                  <a:srgbClr val="1C1C1C"/>
-                </a:solidFill>
-                <a:latin typeface="Georgia"/>
-              </a:rPr>
-              <a:t>Traits that travel · how to use them</a:t>
-            </a:r>
-          </a:p>
-        </p:txBody>
-      </p:sp>
-      <p:sp>
-        <p:nvSpPr>
-          <p:cNvPr id="5" name="Rounded Rectangle 4"/>
-          <p:cNvSpPr/>
-          <p:nvPr/>
-        </p:nvSpPr>
-        <p:spPr>
-          <a:xfrm>
-            <a:off x="502920" y="1143000"/>
-            <a:ext cx="5486400" cy="2468880"/>
-          </a:xfrm>
-          <a:prstGeom prst="roundRect">
-            <a:avLst/>
-          </a:prstGeom>
-          <a:solidFill>
-            <a:srgbClr val="FFFFFF"/>
-          </a:solidFill>
-          <a:ln>
-            <a:solidFill>
-              <a:srgbClr val="D0D4DB"/>
-            </a:solidFill>
-          </a:ln>
-        </p:spPr>
-        <p:style>
-          <a:lnRef idx="1">
-            <a:schemeClr val="accent1"/>
-          </a:lnRef>
-          <a:fillRef idx="3">
-            <a:schemeClr val="accent1"/>
-          </a:fillRef>
-          <a:effectRef idx="2">
-            <a:schemeClr val="accent1"/>
-          </a:effectRef>
-          <a:fontRef idx="minor">
-            <a:schemeClr val="lt1"/>
-          </a:fontRef>
-        </p:style>
-        <p:txBody>
-          <a:bodyPr rtlCol="0" anchor="ctr"/>
-          <a:lstStyle/>
-          <a:p>
-            <a:pPr algn="ctr"/>
-          </a:p>
-        </p:txBody>
-      </p:sp>
-      <p:sp>
-        <p:nvSpPr>
-          <p:cNvPr id="6" name="Rectangle 5"/>
-          <p:cNvSpPr/>
-          <p:nvPr/>
-        </p:nvSpPr>
-        <p:spPr>
-          <a:xfrm>
-            <a:off x="502920" y="1143000"/>
-            <a:ext cx="73152" cy="2468880"/>
-          </a:xfrm>
-          <a:prstGeom prst="rect">
-            <a:avLst/>
-          </a:prstGeom>
-          <a:solidFill>
-            <a:srgbClr val="3D5A80"/>
-          </a:solidFill>
-          <a:ln>
-            <a:noFill/>
-          </a:ln>
-        </p:spPr>
-        <p:style>
-          <a:lnRef idx="1">
-            <a:schemeClr val="accent1"/>
-          </a:lnRef>
-          <a:fillRef idx="3">
-            <a:schemeClr val="accent1"/>
-          </a:fillRef>
-          <a:effectRef idx="2">
-            <a:schemeClr val="accent1"/>
-          </a:effectRef>
-          <a:fontRef idx="minor">
-            <a:schemeClr val="lt1"/>
-          </a:fontRef>
-        </p:style>
-        <p:txBody>
-          <a:bodyPr rtlCol="0" anchor="ctr"/>
-          <a:lstStyle/>
-          <a:p>
-            <a:pPr algn="ctr"/>
-          </a:p>
-        </p:txBody>
-      </p:sp>
-      <p:sp>
-        <p:nvSpPr>
-          <p:cNvPr id="7" name="TextBox 6"/>
-          <p:cNvSpPr txBox="1"/>
-          <p:nvPr/>
-        </p:nvSpPr>
-        <p:spPr>
-          <a:xfrm>
-            <a:off x="704088" y="1252728"/>
-            <a:ext cx="5166360" cy="292608"/>
-          </a:xfrm>
-          <a:prstGeom prst="rect">
-            <a:avLst/>
-          </a:prstGeom>
-          <a:noFill/>
-        </p:spPr>
-        <p:txBody>
-          <a:bodyPr wrap="square">
-            <a:spAutoFit/>
-          </a:bodyPr>
-          <a:lstStyle/>
-          <a:p>
-            <a:pPr algn="l"/>
-            <a:r>
-              <a:rPr sz="1400" b="1">
-                <a:solidFill>
-                  <a:srgbClr val="1C1C1C"/>
-                </a:solidFill>
-                <a:latin typeface="Georgia"/>
-              </a:rPr>
-              <a:t>FBref (scale)</a:t>
-            </a:r>
-          </a:p>
-        </p:txBody>
-      </p:sp>
-      <p:sp>
-        <p:nvSpPr>
-          <p:cNvPr id="8" name="TextBox 7"/>
-          <p:cNvSpPr txBox="1"/>
-          <p:nvPr/>
-        </p:nvSpPr>
-        <p:spPr>
-          <a:xfrm>
-            <a:off x="704088" y="1581912"/>
-            <a:ext cx="5120640" cy="1920240"/>
-          </a:xfrm>
-          <a:prstGeom prst="rect">
-            <a:avLst/>
-          </a:prstGeom>
-          <a:noFill/>
-        </p:spPr>
-        <p:txBody>
-          <a:bodyPr wrap="square">
-            <a:spAutoFit/>
-          </a:bodyPr>
-          <a:lstStyle/>
+              <a:t>Shortlist spans attack · pass · carry · defend · aerial.</a:t>
+            </a:r>
+          </a:p>
           <a:p>
             <a:pPr>
               <a:spcAft>
-                <a:spcPts val="500"/>
+                <a:spcPts val="800"/>
               </a:spcAft>
             </a:pPr>
             <a:r>
-              <a:rPr sz="1300" b="0">
-                <a:solidFill>
-                  <a:srgbClr val="555555"/>
-                </a:solidFill>
-                <a:latin typeface="Calibri"/>
-              </a:rPr>
-              <a:t>Strong travelers: Def Pen touches, PrgC / PrgDist, xG, aerial wins, clearances, take-on success.</a:t>
+              <a:rPr sz="1400" b="0">
+                <a:solidFill>
+                  <a:srgbClr val="1C1C1C"/>
+                </a:solidFill>
+                <a:latin typeface="Arial"/>
+              </a:rPr>
+              <a:t>StatsBomb (depth)</a:t>
             </a:r>
           </a:p>
           <a:p>
             <a:pPr>
               <a:spcAft>
-                <a:spcPts val="500"/>
+                <a:spcPts val="800"/>
               </a:spcAft>
             </a:pPr>
             <a:r>
-              <a:rPr sz="1300" b="0">
-                <a:solidFill>
-                  <a:srgbClr val="555555"/>
-                </a:solidFill>
-                <a:latin typeface="Calibri"/>
-              </a:rPr>
-              <a:t>Shortlist spans attack · pass · carry · defend · aerial.</a:t>
-            </a:r>
-          </a:p>
-        </p:txBody>
-      </p:sp>
-      <p:sp>
-        <p:nvSpPr>
-          <p:cNvPr id="9" name="Rounded Rectangle 8"/>
-          <p:cNvSpPr/>
-          <p:nvPr/>
-        </p:nvSpPr>
-        <p:spPr>
-          <a:xfrm>
-            <a:off x="6172200" y="1143000"/>
-            <a:ext cx="5440680" cy="2468880"/>
-          </a:xfrm>
-          <a:prstGeom prst="roundRect">
-            <a:avLst/>
-          </a:prstGeom>
-          <a:solidFill>
-            <a:srgbClr val="FFFFFF"/>
-          </a:solidFill>
-          <a:ln>
-            <a:solidFill>
-              <a:srgbClr val="D0D4DB"/>
-            </a:solidFill>
-          </a:ln>
-        </p:spPr>
-        <p:style>
-          <a:lnRef idx="1">
-            <a:schemeClr val="accent1"/>
-          </a:lnRef>
-          <a:fillRef idx="3">
-            <a:schemeClr val="accent1"/>
-          </a:fillRef>
-          <a:effectRef idx="2">
-            <a:schemeClr val="accent1"/>
-          </a:effectRef>
-          <a:fontRef idx="minor">
-            <a:schemeClr val="lt1"/>
-          </a:fontRef>
-        </p:style>
-        <p:txBody>
-          <a:bodyPr rtlCol="0" anchor="ctr"/>
-          <a:lstStyle/>
-          <a:p>
-            <a:pPr algn="ctr"/>
-          </a:p>
-        </p:txBody>
-      </p:sp>
-      <p:sp>
-        <p:nvSpPr>
-          <p:cNvPr id="10" name="Rectangle 9"/>
-          <p:cNvSpPr/>
-          <p:nvPr/>
-        </p:nvSpPr>
-        <p:spPr>
-          <a:xfrm>
-            <a:off x="6172200" y="1143000"/>
-            <a:ext cx="73152" cy="2468880"/>
-          </a:xfrm>
-          <a:prstGeom prst="rect">
-            <a:avLst/>
-          </a:prstGeom>
-          <a:solidFill>
-            <a:srgbClr val="2F9E79"/>
-          </a:solidFill>
-          <a:ln>
-            <a:noFill/>
-          </a:ln>
-        </p:spPr>
-        <p:style>
-          <a:lnRef idx="1">
-            <a:schemeClr val="accent1"/>
-          </a:lnRef>
-          <a:fillRef idx="3">
-            <a:schemeClr val="accent1"/>
-          </a:fillRef>
-          <a:effectRef idx="2">
-            <a:schemeClr val="accent1"/>
-          </a:effectRef>
-          <a:fontRef idx="minor">
-            <a:schemeClr val="lt1"/>
-          </a:fontRef>
-        </p:style>
-        <p:txBody>
-          <a:bodyPr rtlCol="0" anchor="ctr"/>
-          <a:lstStyle/>
-          <a:p>
-            <a:pPr algn="ctr"/>
-          </a:p>
-        </p:txBody>
-      </p:sp>
-      <p:sp>
-        <p:nvSpPr>
-          <p:cNvPr id="11" name="TextBox 10"/>
-          <p:cNvSpPr txBox="1"/>
-          <p:nvPr/>
-        </p:nvSpPr>
-        <p:spPr>
-          <a:xfrm>
-            <a:off x="6373368" y="1252728"/>
-            <a:ext cx="5120640" cy="292608"/>
-          </a:xfrm>
-          <a:prstGeom prst="rect">
-            <a:avLst/>
-          </a:prstGeom>
-          <a:noFill/>
-        </p:spPr>
-        <p:txBody>
-          <a:bodyPr wrap="square">
-            <a:spAutoFit/>
-          </a:bodyPr>
-          <a:lstStyle/>
-          <a:p>
-            <a:pPr algn="l"/>
-            <a:r>
-              <a:rPr sz="1400" b="1">
+              <a:rPr sz="1400" b="0">
                 <a:solidFill>
                   <a:srgbClr val="1C1C1C"/>
                 </a:solidFill>
-                <a:latin typeface="Georgia"/>
-              </a:rPr>
-              <a:t>StatsBomb (depth)</a:t>
-            </a:r>
-          </a:p>
-        </p:txBody>
-      </p:sp>
-      <p:sp>
-        <p:nvSpPr>
-          <p:cNvPr id="12" name="TextBox 11"/>
-          <p:cNvSpPr txBox="1"/>
-          <p:nvPr/>
-        </p:nvSpPr>
-        <p:spPr>
-          <a:xfrm>
-            <a:off x="6373368" y="1581912"/>
-            <a:ext cx="5074920" cy="1920240"/>
-          </a:xfrm>
-          <a:prstGeom prst="rect">
-            <a:avLst/>
-          </a:prstGeom>
-          <a:noFill/>
-        </p:spPr>
-        <p:txBody>
-          <a:bodyPr wrap="square">
-            <a:spAutoFit/>
-          </a:bodyPr>
-          <a:lstStyle/>
+                <a:latin typeface="Arial"/>
+              </a:rPr>
+              <a:t>Strong travelers: dispossessed (inv), progressive passes, pressures.</a:t>
+            </a:r>
+          </a:p>
           <a:p>
             <a:pPr>
               <a:spcAft>
-                <a:spcPts val="400"/>
+                <a:spcPts val="800"/>
               </a:spcAft>
             </a:pPr>
             <a:r>
-              <a:rPr sz="1300" b="0">
-                <a:solidFill>
-                  <a:srgbClr val="555555"/>
-                </a:solidFill>
-                <a:latin typeface="Calibri"/>
-              </a:rPr>
-              <a:t>Strong travelers: dispossessed (inv), progressive passes, pressures.</a:t>
+              <a:rPr sz="1400" b="0">
+                <a:solidFill>
+                  <a:srgbClr val="1C1C1C"/>
+                </a:solidFill>
+                <a:latin typeface="Arial"/>
+              </a:rPr>
+              <a:t>11 stability passers on N=60 — live in the combined explorer with FBref.</a:t>
             </a:r>
           </a:p>
           <a:p>
             <a:pPr>
               <a:spcAft>
-                <a:spcPts val="400"/>
+                <a:spcPts val="800"/>
               </a:spcAft>
             </a:pPr>
             <a:r>
-              <a:rPr sz="1300" b="0">
-                <a:solidFill>
-                  <a:srgbClr val="555555"/>
-                </a:solidFill>
-                <a:latin typeface="Calibri"/>
-              </a:rPr>
-              <a:t>11 stability passers on N=60 — live in the combined explorer with FBref.</a:t>
-            </a:r>
-          </a:p>
-        </p:txBody>
-      </p:sp>
-      <p:sp>
-        <p:nvSpPr>
-          <p:cNvPr id="13" name="Rounded Rectangle 12"/>
-          <p:cNvSpPr/>
-          <p:nvPr/>
-        </p:nvSpPr>
-        <p:spPr>
-          <a:xfrm>
-            <a:off x="502920" y="3840480"/>
-            <a:ext cx="11109960" cy="2377440"/>
-          </a:xfrm>
-          <a:prstGeom prst="roundRect">
-            <a:avLst/>
-          </a:prstGeom>
-          <a:solidFill>
-            <a:srgbClr val="FFFFFF"/>
-          </a:solidFill>
-          <a:ln>
-            <a:solidFill>
-              <a:srgbClr val="D0D4DB"/>
-            </a:solidFill>
-          </a:ln>
-        </p:spPr>
-        <p:style>
-          <a:lnRef idx="1">
-            <a:schemeClr val="accent1"/>
-          </a:lnRef>
-          <a:fillRef idx="3">
-            <a:schemeClr val="accent1"/>
-          </a:fillRef>
-          <a:effectRef idx="2">
-            <a:schemeClr val="accent1"/>
-          </a:effectRef>
-          <a:fontRef idx="minor">
-            <a:schemeClr val="lt1"/>
-          </a:fontRef>
-        </p:style>
-        <p:txBody>
-          <a:bodyPr rtlCol="0" anchor="ctr"/>
-          <a:lstStyle/>
-          <a:p>
-            <a:pPr algn="ctr"/>
-          </a:p>
-        </p:txBody>
-      </p:sp>
-      <p:sp>
-        <p:nvSpPr>
-          <p:cNvPr id="14" name="Rectangle 13"/>
-          <p:cNvSpPr/>
-          <p:nvPr/>
-        </p:nvSpPr>
-        <p:spPr>
-          <a:xfrm>
-            <a:off x="502920" y="3840480"/>
-            <a:ext cx="73152" cy="2377440"/>
-          </a:xfrm>
-          <a:prstGeom prst="rect">
-            <a:avLst/>
-          </a:prstGeom>
-          <a:solidFill>
-            <a:srgbClr val="3D5A80"/>
-          </a:solidFill>
-          <a:ln>
-            <a:noFill/>
-          </a:ln>
-        </p:spPr>
-        <p:style>
-          <a:lnRef idx="1">
-            <a:schemeClr val="accent1"/>
-          </a:lnRef>
-          <a:fillRef idx="3">
-            <a:schemeClr val="accent1"/>
-          </a:fillRef>
-          <a:effectRef idx="2">
-            <a:schemeClr val="accent1"/>
-          </a:effectRef>
-          <a:fontRef idx="minor">
-            <a:schemeClr val="lt1"/>
-          </a:fontRef>
-        </p:style>
-        <p:txBody>
-          <a:bodyPr rtlCol="0" anchor="ctr"/>
-          <a:lstStyle/>
-          <a:p>
-            <a:pPr algn="ctr"/>
-          </a:p>
-        </p:txBody>
-      </p:sp>
-      <p:sp>
-        <p:nvSpPr>
-          <p:cNvPr id="15" name="TextBox 14"/>
-          <p:cNvSpPr txBox="1"/>
-          <p:nvPr/>
-        </p:nvSpPr>
-        <p:spPr>
-          <a:xfrm>
-            <a:off x="704088" y="3950208"/>
-            <a:ext cx="10789920" cy="292608"/>
-          </a:xfrm>
-          <a:prstGeom prst="rect">
-            <a:avLst/>
-          </a:prstGeom>
-          <a:noFill/>
-        </p:spPr>
-        <p:txBody>
-          <a:bodyPr wrap="square">
-            <a:spAutoFit/>
-          </a:bodyPr>
-          <a:lstStyle/>
-          <a:p>
-            <a:pPr algn="l"/>
-            <a:r>
-              <a:rPr sz="1400" b="1">
+              <a:rPr sz="1400" b="0">
                 <a:solidFill>
                   <a:srgbClr val="1C1C1C"/>
                 </a:solidFill>
-                <a:latin typeface="Georgia"/>
+                <a:latin typeface="Arial"/>
               </a:rPr>
               <a:t>Scout use</a:t>
             </a:r>
           </a:p>
-        </p:txBody>
-      </p:sp>
-      <p:sp>
-        <p:nvSpPr>
-          <p:cNvPr id="16" name="TextBox 15"/>
-          <p:cNvSpPr txBox="1"/>
-          <p:nvPr/>
-        </p:nvSpPr>
-        <p:spPr>
-          <a:xfrm>
-            <a:off x="704088" y="4279392"/>
-            <a:ext cx="10744200" cy="1828800"/>
-          </a:xfrm>
-          <a:prstGeom prst="rect">
-            <a:avLst/>
-          </a:prstGeom>
-          <a:noFill/>
-        </p:spPr>
-        <p:txBody>
-          <a:bodyPr wrap="square">
-            <a:spAutoFit/>
-          </a:bodyPr>
-          <a:lstStyle/>
           <a:p>
             <a:pPr>
               <a:spcAft>
-                <a:spcPts val="400"/>
+                <a:spcPts val="800"/>
               </a:spcAft>
             </a:pPr>
             <a:r>
-              <a:rPr sz="1300" b="0">
-                <a:solidFill>
-                  <a:srgbClr val="555555"/>
-                </a:solidFill>
-                <a:latin typeface="Calibri"/>
+              <a:rPr sz="1400" b="0">
+                <a:solidFill>
+                  <a:srgbClr val="1C1C1C"/>
+                </a:solidFill>
+                <a:latin typeface="Arial"/>
               </a:rPr>
               <a:t>When evaluating a Big 5 → Bundesliga target, weight shortlisted traits higher than flashy unstable ones.</a:t>
             </a:r>
@@ -12086,15 +11372,15 @@
           <a:p>
             <a:pPr>
               <a:spcAft>
-                <a:spcPts val="400"/>
+                <a:spcPts val="800"/>
               </a:spcAft>
             </a:pPr>
             <a:r>
-              <a:rPr sz="1300" b="0">
-                <a:solidFill>
-                  <a:srgbClr val="555555"/>
-                </a:solidFill>
-                <a:latin typeface="Calibri"/>
+              <a:rPr sz="1400" b="0">
+                <a:solidFill>
+                  <a:srgbClr val="1C1C1C"/>
+                </a:solidFill>
+                <a:latin typeface="Arial"/>
               </a:rPr>
               <a:t>Do not treat two metrics in a redundant pair as independent evidence — unless you intentionally kept both (e.g. aerial wins + losses).</a:t>
             </a:r>
@@ -12102,15 +11388,15 @@
           <a:p>
             <a:pPr>
               <a:spcAft>
-                <a:spcPts val="400"/>
+                <a:spcPts val="800"/>
               </a:spcAft>
             </a:pPr>
             <a:r>
-              <a:rPr sz="1300" b="0">
-                <a:solidFill>
-                  <a:srgbClr val="555555"/>
-                </a:solidFill>
-                <a:latin typeface="Calibri"/>
+              <a:rPr sz="1400" b="0">
+                <a:solidFill>
+                  <a:srgbClr val="1C1C1C"/>
+                </a:solidFill>
+                <a:latin typeface="Arial"/>
               </a:rPr>
               <a:t>Explorer: one HTML tool combining FBref + StatsBomb (toggle source). Gates: FBref r≥0.50 · StatsBomb r≥0.41.</a:t>
             </a:r>
@@ -13145,8 +12431,8 @@
         </p:nvSpPr>
         <p:spPr>
           <a:xfrm>
-            <a:off x="502920" y="274320"/>
-            <a:ext cx="10972800" cy="274320"/>
+            <a:off x="548640" y="411480"/>
+            <a:ext cx="10972800" cy="5943600"/>
           </a:xfrm>
           <a:prstGeom prst="rect">
             <a:avLst/>
@@ -13159,29 +12445,350 @@
           </a:bodyPr>
           <a:lstStyle/>
           <a:p>
-            <a:pPr algn="l"/>
-            <a:r>
-              <a:rPr sz="1300" b="1">
+            <a:pPr>
+              <a:spcAft>
+                <a:spcPts val="800"/>
+              </a:spcAft>
+            </a:pPr>
+            <a:r>
+              <a:rPr sz="2800" b="1">
                 <a:solidFill>
                   <a:srgbClr val="3D5A80"/>
                 </a:solidFill>
-                <a:latin typeface="Calibri"/>
+                <a:latin typeface="Georgia"/>
               </a:rPr>
               <a:t>6 · DELIVERABLES</a:t>
             </a:r>
           </a:p>
-        </p:txBody>
-      </p:sp>
-      <p:sp>
-        <p:nvSpPr>
-          <p:cNvPr id="4" name="TextBox 3"/>
+          <a:p>
+            <a:pPr>
+              <a:spcAft>
+                <a:spcPts val="800"/>
+              </a:spcAft>
+            </a:pPr>
+            <a:r>
+              <a:rPr sz="1400" b="0">
+                <a:solidFill>
+                  <a:srgbClr val="1C1C1C"/>
+                </a:solidFill>
+                <a:latin typeface="Arial"/>
+              </a:rPr>
+              <a:t>What ships for Conrad</a:t>
+            </a:r>
+          </a:p>
+          <a:p>
+            <a:pPr>
+              <a:spcAft>
+                <a:spcPts val="800"/>
+              </a:spcAft>
+            </a:pPr>
+            <a:r>
+              <a:rPr sz="1400" b="0">
+                <a:solidFill>
+                  <a:srgbClr val="1C1C1C"/>
+                </a:solidFill>
+                <a:latin typeface="Arial"/>
+              </a:rPr>
+              <a:t>Deck</a:t>
+            </a:r>
+          </a:p>
+          <a:p>
+            <a:pPr>
+              <a:spcAft>
+                <a:spcPts val="800"/>
+              </a:spcAft>
+            </a:pPr>
+            <a:r>
+              <a:rPr sz="1400" b="0">
+                <a:solidFill>
+                  <a:srgbClr val="1C1C1C"/>
+                </a:solidFill>
+                <a:latin typeface="Arial"/>
+              </a:rPr>
+              <a:t>bundesliga_transfer_traits.pptx — this file (mirrors the HTML brief)</a:t>
+            </a:r>
+          </a:p>
+          <a:p>
+            <a:pPr>
+              <a:spcAft>
+                <a:spcPts val="800"/>
+              </a:spcAft>
+            </a:pPr>
+            <a:r>
+              <a:rPr sz="1400" b="0">
+                <a:solidFill>
+                  <a:srgbClr val="1C1C1C"/>
+                </a:solidFill>
+                <a:latin typeface="Arial"/>
+              </a:rPr>
+              <a:t>Explorer</a:t>
+            </a:r>
+          </a:p>
+          <a:p>
+            <a:pPr>
+              <a:spcAft>
+                <a:spcPts val="800"/>
+              </a:spcAft>
+            </a:pPr>
+            <a:r>
+              <a:rPr sz="1400" b="0">
+                <a:solidFill>
+                  <a:srgbClr val="1C1C1C"/>
+                </a:solidFill>
+                <a:latin typeface="Arial"/>
+              </a:rPr>
+              <a:t>interactive_player_explorer.html — combines FBref + StatsBomb; category pizza + percentiles</a:t>
+            </a:r>
+          </a:p>
+          <a:p>
+            <a:pPr>
+              <a:spcAft>
+                <a:spcPts val="800"/>
+              </a:spcAft>
+            </a:pPr>
+            <a:r>
+              <a:rPr sz="1400" b="0">
+                <a:solidFill>
+                  <a:srgbClr val="1C1C1C"/>
+                </a:solidFill>
+                <a:latin typeface="Arial"/>
+              </a:rPr>
+              <a:t>Brief</a:t>
+            </a:r>
+          </a:p>
+          <a:p>
+            <a:pPr>
+              <a:spcAft>
+                <a:spcPts val="800"/>
+              </a:spcAft>
+            </a:pPr>
+            <a:r>
+              <a:rPr sz="1400" b="0">
+                <a:solidFill>
+                  <a:srgbClr val="1C1C1C"/>
+                </a:solidFill>
+                <a:latin typeface="Arial"/>
+              </a:rPr>
+              <a:t>methodology_results_brief.html — same explanation + tables</a:t>
+            </a:r>
+          </a:p>
+          <a:p>
+            <a:pPr>
+              <a:spcAft>
+                <a:spcPts val="800"/>
+              </a:spcAft>
+            </a:pPr>
+            <a:r>
+              <a:rPr sz="1400" b="0">
+                <a:solidFill>
+                  <a:srgbClr val="1C1C1C"/>
+                </a:solidFill>
+                <a:latin typeface="Arial"/>
+              </a:rPr>
+              <a:t>Proposal</a:t>
+            </a:r>
+          </a:p>
+          <a:p>
+            <a:pPr>
+              <a:spcAft>
+                <a:spcPts val="800"/>
+              </a:spcAft>
+            </a:pPr>
+            <a:r>
+              <a:rPr sz="1400" b="0">
+                <a:solidFill>
+                  <a:srgbClr val="1C1C1C"/>
+                </a:solidFill>
+                <a:latin typeface="Arial"/>
+              </a:rPr>
+              <a:t>projectproposal / conrad docs</a:t>
+            </a:r>
+          </a:p>
+          <a:p>
+            <a:pPr>
+              <a:spcAft>
+                <a:spcPts val="800"/>
+              </a:spcAft>
+            </a:pPr>
+            <a:r>
+              <a:rPr sz="1400" b="0">
+                <a:solidFill>
+                  <a:srgbClr val="1C1C1C"/>
+                </a:solidFill>
+                <a:latin typeface="Arial"/>
+              </a:rPr>
+              <a:t>Decisions</a:t>
+            </a:r>
+          </a:p>
+          <a:p>
+            <a:pPr>
+              <a:spcAft>
+                <a:spcPts val="800"/>
+              </a:spcAft>
+            </a:pPr>
+            <a:r>
+              <a:rPr sz="1400" b="0">
+                <a:solidFill>
+                  <a:srgbClr val="1C1C1C"/>
+                </a:solidFill>
+                <a:latin typeface="Arial"/>
+              </a:rPr>
+              <a:t>decisions/step2_*.json + PDFs (local)</a:t>
+            </a:r>
+          </a:p>
+          <a:p>
+            <a:pPr>
+              <a:spcAft>
+                <a:spcPts val="800"/>
+              </a:spcAft>
+            </a:pPr>
+            <a:r>
+              <a:rPr sz="1400" b="0">
+                <a:solidFill>
+                  <a:srgbClr val="1C1C1C"/>
+                </a:solidFill>
+                <a:latin typeface="Arial"/>
+              </a:rPr>
+              <a:t>Data</a:t>
+            </a:r>
+          </a:p>
+          <a:p>
+            <a:pPr>
+              <a:spcAft>
+                <a:spcPts val="800"/>
+              </a:spcAft>
+            </a:pPr>
+            <a:r>
+              <a:rPr sz="1400" b="0">
+                <a:solidFill>
+                  <a:srgbClr val="1C1C1C"/>
+                </a:solidFill>
+                <a:latin typeface="Arial"/>
+              </a:rPr>
+              <a:t>results/ — stability CSVs, FBREF_RESULTS.md</a:t>
+            </a:r>
+          </a:p>
+          <a:p>
+            <a:pPr>
+              <a:spcAft>
+                <a:spcPts val="800"/>
+              </a:spcAft>
+            </a:pPr>
+            <a:r>
+              <a:rPr sz="1400" b="0">
+                <a:solidFill>
+                  <a:srgbClr val="1C1C1C"/>
+                </a:solidFill>
+                <a:latin typeface="Arial"/>
+              </a:rPr>
+              <a:t>Repo</a:t>
+            </a:r>
+          </a:p>
+          <a:p>
+            <a:pPr>
+              <a:spcAft>
+                <a:spcPts val="800"/>
+              </a:spcAft>
+            </a:pPr>
+            <a:r>
+              <a:rPr sz="1400" b="0">
+                <a:solidFill>
+                  <a:srgbClr val="1C1C1C"/>
+                </a:solidFill>
+                <a:latin typeface="Arial"/>
+              </a:rPr>
+              <a:t>github.com/colbymorris08/bundesliga-transfer-traits</a:t>
+            </a:r>
+          </a:p>
+          <a:p>
+            <a:pPr>
+              <a:spcAft>
+                <a:spcPts val="800"/>
+              </a:spcAft>
+            </a:pPr>
+            <a:r>
+              <a:rPr sz="1400" b="0">
+                <a:solidFill>
+                  <a:srgbClr val="1C1C1C"/>
+                </a:solidFill>
+                <a:latin typeface="Arial"/>
+              </a:rPr>
+              <a:t>FBref gate r≥0.50 · StatsBomb gate r≥0.41</a:t>
+            </a:r>
+          </a:p>
+        </p:txBody>
+      </p:sp>
+    </p:spTree>
+  </p:cSld>
+  <p:clrMapOvr>
+    <a:masterClrMapping/>
+  </p:clrMapOvr>
+</p:sld>
+</file>
+
+<file path=ppt/slides/slide20.xml><?xml version="1.0" encoding="utf-8"?>
+<p:sld xmlns:a="http://schemas.openxmlformats.org/drawingml/2006/main" xmlns:p="http://schemas.openxmlformats.org/presentationml/2006/main" xmlns:r="http://schemas.openxmlformats.org/officeDocument/2006/relationships">
+  <p:cSld>
+    <p:spTree>
+      <p:nvGrpSpPr>
+        <p:cNvPr id="1" name=""/>
+        <p:cNvGrpSpPr/>
+        <p:nvPr/>
+      </p:nvGrpSpPr>
+      <p:grpSpPr/>
+      <p:sp>
+        <p:nvSpPr>
+          <p:cNvPr id="2" name="Rectangle 1"/>
+          <p:cNvSpPr/>
+          <p:nvPr/>
+        </p:nvSpPr>
+        <p:spPr>
+          <a:xfrm>
+            <a:off x="0" y="0"/>
+            <a:ext cx="12191695" cy="6858000"/>
+          </a:xfrm>
+          <a:prstGeom prst="rect">
+            <a:avLst/>
+          </a:prstGeom>
+          <a:solidFill>
+            <a:srgbClr val="F4F5F7"/>
+          </a:solidFill>
+          <a:ln>
+            <a:noFill/>
+          </a:ln>
+        </p:spPr>
+        <p:style>
+          <a:lnRef idx="1">
+            <a:schemeClr val="accent1"/>
+          </a:lnRef>
+          <a:fillRef idx="3">
+            <a:schemeClr val="accent1"/>
+          </a:fillRef>
+          <a:effectRef idx="2">
+            <a:schemeClr val="accent1"/>
+          </a:effectRef>
+          <a:fontRef idx="minor">
+            <a:schemeClr val="lt1"/>
+          </a:fontRef>
+        </p:style>
+        <p:txBody>
+          <a:bodyPr rtlCol="0" anchor="ctr"/>
+          <a:lstStyle/>
+          <a:p>
+            <a:pPr algn="ctr"/>
+          </a:p>
+        </p:txBody>
+      </p:sp>
+      <p:sp>
+        <p:nvSpPr>
+          <p:cNvPr id="3" name="TextBox 2"/>
           <p:cNvSpPr txBox="1"/>
           <p:nvPr/>
         </p:nvSpPr>
         <p:spPr>
           <a:xfrm>
-            <a:off x="502920" y="548640"/>
-            <a:ext cx="10972800" cy="365760"/>
+            <a:off x="548640" y="411480"/>
+            <a:ext cx="10972800" cy="5943600"/>
           </a:xfrm>
           <a:prstGeom prst="rect">
             <a:avLst/>
@@ -13194,538 +12801,273 @@
           </a:bodyPr>
           <a:lstStyle/>
           <a:p>
-            <a:pPr algn="l"/>
-            <a:r>
-              <a:rPr sz="2600" b="1">
+            <a:pPr>
+              <a:spcAft>
+                <a:spcPts val="800"/>
+              </a:spcAft>
+            </a:pPr>
+            <a:r>
+              <a:rPr sz="2800" b="1">
+                <a:solidFill>
+                  <a:srgbClr val="3D5A80"/>
+                </a:solidFill>
+                <a:latin typeface="Georgia"/>
+              </a:rPr>
+              <a:t>6 · DELIVERABLES</a:t>
+            </a:r>
+          </a:p>
+          <a:p>
+            <a:pPr>
+              <a:spcAft>
+                <a:spcPts val="800"/>
+              </a:spcAft>
+            </a:pPr>
+            <a:r>
+              <a:rPr sz="1400" b="0">
                 <a:solidFill>
                   <a:srgbClr val="1C1C1C"/>
                 </a:solidFill>
-                <a:latin typeface="Georgia"/>
+                <a:latin typeface="Arial"/>
               </a:rPr>
               <a:t>What ships for Conrad</a:t>
             </a:r>
           </a:p>
-        </p:txBody>
-      </p:sp>
-      <p:sp>
-        <p:nvSpPr>
-          <p:cNvPr id="5" name="TextBox 4"/>
-          <p:cNvSpPr txBox="1"/>
-          <p:nvPr/>
-        </p:nvSpPr>
-        <p:spPr>
-          <a:xfrm>
-            <a:off x="731520" y="1234440"/>
-            <a:ext cx="2103120" cy="320040"/>
-          </a:xfrm>
-          <a:prstGeom prst="rect">
-            <a:avLst/>
-          </a:prstGeom>
-          <a:noFill/>
-        </p:spPr>
-        <p:txBody>
-          <a:bodyPr wrap="square">
-            <a:spAutoFit/>
-          </a:bodyPr>
-          <a:lstStyle/>
-          <a:p>
-            <a:pPr algn="l"/>
-            <a:r>
-              <a:rPr sz="1400" b="1">
-                <a:solidFill>
-                  <a:srgbClr val="3D5A80"/>
-                </a:solidFill>
-                <a:latin typeface="Calibri"/>
+          <a:p>
+            <a:pPr>
+              <a:spcAft>
+                <a:spcPts val="800"/>
+              </a:spcAft>
+            </a:pPr>
+            <a:r>
+              <a:rPr sz="1400" b="0">
+                <a:solidFill>
+                  <a:srgbClr val="1C1C1C"/>
+                </a:solidFill>
+                <a:latin typeface="Arial"/>
               </a:rPr>
               <a:t>Deck</a:t>
             </a:r>
           </a:p>
-        </p:txBody>
-      </p:sp>
-      <p:sp>
-        <p:nvSpPr>
-          <p:cNvPr id="6" name="TextBox 5"/>
-          <p:cNvSpPr txBox="1"/>
-          <p:nvPr/>
-        </p:nvSpPr>
-        <p:spPr>
-          <a:xfrm>
-            <a:off x="2926080" y="1234440"/>
-            <a:ext cx="8503920" cy="320040"/>
-          </a:xfrm>
-          <a:prstGeom prst="rect">
-            <a:avLst/>
-          </a:prstGeom>
-          <a:noFill/>
-        </p:spPr>
-        <p:txBody>
-          <a:bodyPr wrap="square">
-            <a:spAutoFit/>
-          </a:bodyPr>
-          <a:lstStyle/>
-          <a:p>
-            <a:pPr algn="l"/>
+          <a:p>
+            <a:pPr>
+              <a:spcAft>
+                <a:spcPts val="800"/>
+              </a:spcAft>
+            </a:pPr>
             <a:r>
               <a:rPr sz="1400" b="0">
                 <a:solidFill>
                   <a:srgbClr val="1C1C1C"/>
                 </a:solidFill>
-                <a:latin typeface="Calibri"/>
+                <a:latin typeface="Arial"/>
               </a:rPr>
               <a:t>bundesliga_transfer_traits.pptx — this file (mirrors the HTML brief)</a:t>
             </a:r>
           </a:p>
-        </p:txBody>
-      </p:sp>
-      <p:sp>
-        <p:nvSpPr>
-          <p:cNvPr id="7" name="TextBox 6"/>
-          <p:cNvSpPr txBox="1"/>
-          <p:nvPr/>
-        </p:nvSpPr>
-        <p:spPr>
-          <a:xfrm>
-            <a:off x="731520" y="1737360"/>
-            <a:ext cx="2103120" cy="320040"/>
-          </a:xfrm>
-          <a:prstGeom prst="rect">
-            <a:avLst/>
-          </a:prstGeom>
-          <a:noFill/>
-        </p:spPr>
-        <p:txBody>
-          <a:bodyPr wrap="square">
-            <a:spAutoFit/>
-          </a:bodyPr>
-          <a:lstStyle/>
-          <a:p>
-            <a:pPr algn="l"/>
-            <a:r>
-              <a:rPr sz="1400" b="1">
-                <a:solidFill>
-                  <a:srgbClr val="3D5A80"/>
-                </a:solidFill>
-                <a:latin typeface="Calibri"/>
+          <a:p>
+            <a:pPr>
+              <a:spcAft>
+                <a:spcPts val="800"/>
+              </a:spcAft>
+            </a:pPr>
+            <a:r>
+              <a:rPr sz="1400" b="0">
+                <a:solidFill>
+                  <a:srgbClr val="1C1C1C"/>
+                </a:solidFill>
+                <a:latin typeface="Arial"/>
               </a:rPr>
               <a:t>Explorer</a:t>
             </a:r>
           </a:p>
-        </p:txBody>
-      </p:sp>
-      <p:sp>
-        <p:nvSpPr>
-          <p:cNvPr id="8" name="TextBox 7"/>
-          <p:cNvSpPr txBox="1"/>
-          <p:nvPr/>
-        </p:nvSpPr>
-        <p:spPr>
-          <a:xfrm>
-            <a:off x="2926080" y="1737360"/>
-            <a:ext cx="8503920" cy="320040"/>
-          </a:xfrm>
-          <a:prstGeom prst="rect">
-            <a:avLst/>
-          </a:prstGeom>
-          <a:noFill/>
-        </p:spPr>
-        <p:txBody>
-          <a:bodyPr wrap="square">
-            <a:spAutoFit/>
-          </a:bodyPr>
-          <a:lstStyle/>
-          <a:p>
-            <a:pPr algn="l"/>
+          <a:p>
+            <a:pPr>
+              <a:spcAft>
+                <a:spcPts val="800"/>
+              </a:spcAft>
+            </a:pPr>
             <a:r>
               <a:rPr sz="1400" b="0">
                 <a:solidFill>
                   <a:srgbClr val="1C1C1C"/>
                 </a:solidFill>
-                <a:latin typeface="Calibri"/>
+                <a:latin typeface="Arial"/>
               </a:rPr>
               <a:t>interactive_player_explorer.html — combines FBref + StatsBomb; category pizza + percentiles</a:t>
             </a:r>
           </a:p>
-        </p:txBody>
-      </p:sp>
-      <p:sp>
-        <p:nvSpPr>
-          <p:cNvPr id="9" name="TextBox 8"/>
-          <p:cNvSpPr txBox="1"/>
-          <p:nvPr/>
-        </p:nvSpPr>
-        <p:spPr>
-          <a:xfrm>
-            <a:off x="731520" y="2240280"/>
-            <a:ext cx="2103120" cy="320040"/>
-          </a:xfrm>
-          <a:prstGeom prst="rect">
-            <a:avLst/>
-          </a:prstGeom>
-          <a:noFill/>
-        </p:spPr>
-        <p:txBody>
-          <a:bodyPr wrap="square">
-            <a:spAutoFit/>
-          </a:bodyPr>
-          <a:lstStyle/>
-          <a:p>
-            <a:pPr algn="l"/>
-            <a:r>
-              <a:rPr sz="1400" b="1">
-                <a:solidFill>
-                  <a:srgbClr val="3D5A80"/>
-                </a:solidFill>
-                <a:latin typeface="Calibri"/>
+          <a:p>
+            <a:pPr>
+              <a:spcAft>
+                <a:spcPts val="800"/>
+              </a:spcAft>
+            </a:pPr>
+            <a:r>
+              <a:rPr sz="1400" b="0">
+                <a:solidFill>
+                  <a:srgbClr val="1C1C1C"/>
+                </a:solidFill>
+                <a:latin typeface="Arial"/>
               </a:rPr>
               <a:t>Brief</a:t>
             </a:r>
           </a:p>
-        </p:txBody>
-      </p:sp>
-      <p:sp>
-        <p:nvSpPr>
-          <p:cNvPr id="10" name="TextBox 9"/>
-          <p:cNvSpPr txBox="1"/>
-          <p:nvPr/>
-        </p:nvSpPr>
-        <p:spPr>
-          <a:xfrm>
-            <a:off x="2926080" y="2240280"/>
-            <a:ext cx="8503920" cy="320040"/>
-          </a:xfrm>
-          <a:prstGeom prst="rect">
-            <a:avLst/>
-          </a:prstGeom>
-          <a:noFill/>
-        </p:spPr>
-        <p:txBody>
-          <a:bodyPr wrap="square">
-            <a:spAutoFit/>
-          </a:bodyPr>
-          <a:lstStyle/>
-          <a:p>
-            <a:pPr algn="l"/>
+          <a:p>
+            <a:pPr>
+              <a:spcAft>
+                <a:spcPts val="800"/>
+              </a:spcAft>
+            </a:pPr>
             <a:r>
               <a:rPr sz="1400" b="0">
                 <a:solidFill>
                   <a:srgbClr val="1C1C1C"/>
                 </a:solidFill>
-                <a:latin typeface="Calibri"/>
+                <a:latin typeface="Arial"/>
               </a:rPr>
               <a:t>methodology_results_brief.html — same explanation + tables</a:t>
             </a:r>
           </a:p>
-        </p:txBody>
-      </p:sp>
-      <p:sp>
-        <p:nvSpPr>
-          <p:cNvPr id="11" name="TextBox 10"/>
-          <p:cNvSpPr txBox="1"/>
-          <p:nvPr/>
-        </p:nvSpPr>
-        <p:spPr>
-          <a:xfrm>
-            <a:off x="731520" y="2743200"/>
-            <a:ext cx="2103120" cy="320040"/>
-          </a:xfrm>
-          <a:prstGeom prst="rect">
-            <a:avLst/>
-          </a:prstGeom>
-          <a:noFill/>
-        </p:spPr>
-        <p:txBody>
-          <a:bodyPr wrap="square">
-            <a:spAutoFit/>
-          </a:bodyPr>
-          <a:lstStyle/>
-          <a:p>
-            <a:pPr algn="l"/>
-            <a:r>
-              <a:rPr sz="1400" b="1">
-                <a:solidFill>
-                  <a:srgbClr val="3D5A80"/>
-                </a:solidFill>
-                <a:latin typeface="Calibri"/>
+          <a:p>
+            <a:pPr>
+              <a:spcAft>
+                <a:spcPts val="800"/>
+              </a:spcAft>
+            </a:pPr>
+            <a:r>
+              <a:rPr sz="1400" b="0">
+                <a:solidFill>
+                  <a:srgbClr val="1C1C1C"/>
+                </a:solidFill>
+                <a:latin typeface="Arial"/>
               </a:rPr>
               <a:t>Proposal</a:t>
             </a:r>
           </a:p>
-        </p:txBody>
-      </p:sp>
-      <p:sp>
-        <p:nvSpPr>
-          <p:cNvPr id="12" name="TextBox 11"/>
-          <p:cNvSpPr txBox="1"/>
-          <p:nvPr/>
-        </p:nvSpPr>
-        <p:spPr>
-          <a:xfrm>
-            <a:off x="2926080" y="2743200"/>
-            <a:ext cx="8503920" cy="320040"/>
-          </a:xfrm>
-          <a:prstGeom prst="rect">
-            <a:avLst/>
-          </a:prstGeom>
-          <a:noFill/>
-        </p:spPr>
-        <p:txBody>
-          <a:bodyPr wrap="square">
-            <a:spAutoFit/>
-          </a:bodyPr>
-          <a:lstStyle/>
-          <a:p>
-            <a:pPr algn="l"/>
+          <a:p>
+            <a:pPr>
+              <a:spcAft>
+                <a:spcPts val="800"/>
+              </a:spcAft>
+            </a:pPr>
             <a:r>
               <a:rPr sz="1400" b="0">
                 <a:solidFill>
                   <a:srgbClr val="1C1C1C"/>
                 </a:solidFill>
-                <a:latin typeface="Calibri"/>
+                <a:latin typeface="Arial"/>
               </a:rPr>
               <a:t>projectproposal / conrad docs</a:t>
             </a:r>
           </a:p>
-        </p:txBody>
-      </p:sp>
-      <p:sp>
-        <p:nvSpPr>
-          <p:cNvPr id="13" name="TextBox 12"/>
-          <p:cNvSpPr txBox="1"/>
-          <p:nvPr/>
-        </p:nvSpPr>
-        <p:spPr>
-          <a:xfrm>
-            <a:off x="731520" y="3246120"/>
-            <a:ext cx="2103120" cy="320040"/>
-          </a:xfrm>
-          <a:prstGeom prst="rect">
-            <a:avLst/>
-          </a:prstGeom>
-          <a:noFill/>
-        </p:spPr>
-        <p:txBody>
-          <a:bodyPr wrap="square">
-            <a:spAutoFit/>
-          </a:bodyPr>
-          <a:lstStyle/>
-          <a:p>
-            <a:pPr algn="l"/>
-            <a:r>
-              <a:rPr sz="1400" b="1">
-                <a:solidFill>
-                  <a:srgbClr val="3D5A80"/>
-                </a:solidFill>
-                <a:latin typeface="Calibri"/>
+          <a:p>
+            <a:pPr>
+              <a:spcAft>
+                <a:spcPts val="800"/>
+              </a:spcAft>
+            </a:pPr>
+            <a:r>
+              <a:rPr sz="1400" b="0">
+                <a:solidFill>
+                  <a:srgbClr val="1C1C1C"/>
+                </a:solidFill>
+                <a:latin typeface="Arial"/>
               </a:rPr>
               <a:t>Decisions</a:t>
             </a:r>
           </a:p>
-        </p:txBody>
-      </p:sp>
-      <p:sp>
-        <p:nvSpPr>
-          <p:cNvPr id="14" name="TextBox 13"/>
-          <p:cNvSpPr txBox="1"/>
-          <p:nvPr/>
-        </p:nvSpPr>
-        <p:spPr>
-          <a:xfrm>
-            <a:off x="2926080" y="3246120"/>
-            <a:ext cx="8503920" cy="320040"/>
-          </a:xfrm>
-          <a:prstGeom prst="rect">
-            <a:avLst/>
-          </a:prstGeom>
-          <a:noFill/>
-        </p:spPr>
-        <p:txBody>
-          <a:bodyPr wrap="square">
-            <a:spAutoFit/>
-          </a:bodyPr>
-          <a:lstStyle/>
-          <a:p>
-            <a:pPr algn="l"/>
+          <a:p>
+            <a:pPr>
+              <a:spcAft>
+                <a:spcPts val="800"/>
+              </a:spcAft>
+            </a:pPr>
             <a:r>
               <a:rPr sz="1400" b="0">
                 <a:solidFill>
                   <a:srgbClr val="1C1C1C"/>
                 </a:solidFill>
-                <a:latin typeface="Calibri"/>
+                <a:latin typeface="Arial"/>
               </a:rPr>
               <a:t>decisions/step2_*.json + PDFs (local)</a:t>
             </a:r>
           </a:p>
-        </p:txBody>
-      </p:sp>
-      <p:sp>
-        <p:nvSpPr>
-          <p:cNvPr id="15" name="TextBox 14"/>
-          <p:cNvSpPr txBox="1"/>
-          <p:nvPr/>
-        </p:nvSpPr>
-        <p:spPr>
-          <a:xfrm>
-            <a:off x="731520" y="3749039"/>
-            <a:ext cx="2103120" cy="320040"/>
-          </a:xfrm>
-          <a:prstGeom prst="rect">
-            <a:avLst/>
-          </a:prstGeom>
-          <a:noFill/>
-        </p:spPr>
-        <p:txBody>
-          <a:bodyPr wrap="square">
-            <a:spAutoFit/>
-          </a:bodyPr>
-          <a:lstStyle/>
-          <a:p>
-            <a:pPr algn="l"/>
-            <a:r>
-              <a:rPr sz="1400" b="1">
-                <a:solidFill>
-                  <a:srgbClr val="3D5A80"/>
-                </a:solidFill>
-                <a:latin typeface="Calibri"/>
+          <a:p>
+            <a:pPr>
+              <a:spcAft>
+                <a:spcPts val="800"/>
+              </a:spcAft>
+            </a:pPr>
+            <a:r>
+              <a:rPr sz="1400" b="0">
+                <a:solidFill>
+                  <a:srgbClr val="1C1C1C"/>
+                </a:solidFill>
+                <a:latin typeface="Arial"/>
               </a:rPr>
               <a:t>Data</a:t>
             </a:r>
           </a:p>
-        </p:txBody>
-      </p:sp>
-      <p:sp>
-        <p:nvSpPr>
-          <p:cNvPr id="16" name="TextBox 15"/>
-          <p:cNvSpPr txBox="1"/>
-          <p:nvPr/>
-        </p:nvSpPr>
-        <p:spPr>
-          <a:xfrm>
-            <a:off x="2926080" y="3749039"/>
-            <a:ext cx="8503920" cy="320040"/>
-          </a:xfrm>
-          <a:prstGeom prst="rect">
-            <a:avLst/>
-          </a:prstGeom>
-          <a:noFill/>
-        </p:spPr>
-        <p:txBody>
-          <a:bodyPr wrap="square">
-            <a:spAutoFit/>
-          </a:bodyPr>
-          <a:lstStyle/>
-          <a:p>
-            <a:pPr algn="l"/>
+          <a:p>
+            <a:pPr>
+              <a:spcAft>
+                <a:spcPts val="800"/>
+              </a:spcAft>
+            </a:pPr>
             <a:r>
               <a:rPr sz="1400" b="0">
                 <a:solidFill>
                   <a:srgbClr val="1C1C1C"/>
                 </a:solidFill>
-                <a:latin typeface="Calibri"/>
+                <a:latin typeface="Arial"/>
               </a:rPr>
               <a:t>results/ — stability CSVs, FBREF_RESULTS.md</a:t>
             </a:r>
           </a:p>
-        </p:txBody>
-      </p:sp>
-      <p:sp>
-        <p:nvSpPr>
-          <p:cNvPr id="17" name="TextBox 16"/>
-          <p:cNvSpPr txBox="1"/>
-          <p:nvPr/>
-        </p:nvSpPr>
-        <p:spPr>
-          <a:xfrm>
-            <a:off x="731520" y="4251959"/>
-            <a:ext cx="2103120" cy="320040"/>
-          </a:xfrm>
-          <a:prstGeom prst="rect">
-            <a:avLst/>
-          </a:prstGeom>
-          <a:noFill/>
-        </p:spPr>
-        <p:txBody>
-          <a:bodyPr wrap="square">
-            <a:spAutoFit/>
-          </a:bodyPr>
-          <a:lstStyle/>
-          <a:p>
-            <a:pPr algn="l"/>
-            <a:r>
-              <a:rPr sz="1400" b="1">
-                <a:solidFill>
-                  <a:srgbClr val="3D5A80"/>
-                </a:solidFill>
-                <a:latin typeface="Calibri"/>
+          <a:p>
+            <a:pPr>
+              <a:spcAft>
+                <a:spcPts val="800"/>
+              </a:spcAft>
+            </a:pPr>
+            <a:r>
+              <a:rPr sz="1400" b="0">
+                <a:solidFill>
+                  <a:srgbClr val="1C1C1C"/>
+                </a:solidFill>
+                <a:latin typeface="Arial"/>
               </a:rPr>
               <a:t>Repo</a:t>
             </a:r>
           </a:p>
-        </p:txBody>
-      </p:sp>
-      <p:sp>
-        <p:nvSpPr>
-          <p:cNvPr id="18" name="TextBox 17"/>
-          <p:cNvSpPr txBox="1"/>
-          <p:nvPr/>
-        </p:nvSpPr>
-        <p:spPr>
-          <a:xfrm>
-            <a:off x="2926080" y="4251959"/>
-            <a:ext cx="8503920" cy="320040"/>
-          </a:xfrm>
-          <a:prstGeom prst="rect">
-            <a:avLst/>
-          </a:prstGeom>
-          <a:noFill/>
-        </p:spPr>
-        <p:txBody>
-          <a:bodyPr wrap="square">
-            <a:spAutoFit/>
-          </a:bodyPr>
-          <a:lstStyle/>
-          <a:p>
-            <a:pPr algn="l"/>
+          <a:p>
+            <a:pPr>
+              <a:spcAft>
+                <a:spcPts val="800"/>
+              </a:spcAft>
+            </a:pPr>
             <a:r>
               <a:rPr sz="1400" b="0">
                 <a:solidFill>
                   <a:srgbClr val="1C1C1C"/>
                 </a:solidFill>
-                <a:latin typeface="Calibri"/>
+                <a:latin typeface="Arial"/>
               </a:rPr>
               <a:t>github.com/colbymorris08/bundesliga-transfer-traits</a:t>
             </a:r>
           </a:p>
-        </p:txBody>
-      </p:sp>
-      <p:sp>
-        <p:nvSpPr>
-          <p:cNvPr id="19" name="TextBox 18"/>
-          <p:cNvSpPr txBox="1"/>
-          <p:nvPr/>
-        </p:nvSpPr>
-        <p:spPr>
-          <a:xfrm>
-            <a:off x="502920" y="6126480"/>
-            <a:ext cx="10972800" cy="320040"/>
-          </a:xfrm>
-          <a:prstGeom prst="rect">
-            <a:avLst/>
-          </a:prstGeom>
-          <a:noFill/>
-        </p:spPr>
-        <p:txBody>
-          <a:bodyPr wrap="square">
-            <a:spAutoFit/>
-          </a:bodyPr>
-          <a:lstStyle/>
-          <a:p>
-            <a:pPr algn="l"/>
-            <a:r>
-              <a:rPr sz="1300" b="0">
-                <a:solidFill>
-                  <a:srgbClr val="555555"/>
-                </a:solidFill>
-                <a:latin typeface="Calibri"/>
+          <a:p>
+            <a:pPr>
+              <a:spcAft>
+                <a:spcPts val="800"/>
+              </a:spcAft>
+            </a:pPr>
+            <a:r>
+              <a:rPr sz="1400" b="0">
+                <a:solidFill>
+                  <a:srgbClr val="1C1C1C"/>
+                </a:solidFill>
+                <a:latin typeface="Arial"/>
               </a:rPr>
               <a:t>FBref gate r≥0.50 · StatsBomb gate r≥0.41</a:t>
             </a:r>
